--- a/courses/build/teach-the-teachers/T-D3.pptx
+++ b/courses/build/teach-the-teachers/T-D3.pptx
@@ -4859,7 +4859,7 @@
     <p:bg>
       <p:bgPr>
         <a:solidFill>
-          <a:srgbClr val="1F4D2B"/>
+          <a:srgbClr val="2F3A33"/>
         </a:solidFill>
         <a:effectLst/>
       </p:bgPr>
@@ -4901,9 +4901,9 @@
             <a:r>
               <a:rPr sz="1000" b="0">
                 <a:solidFill>
-                  <a:srgbClr val="A8D88A"/>
-                </a:solidFill>
-                <a:latin typeface="Arial"/>
+                  <a:srgbClr val="F2EFE6"/>
+                </a:solidFill>
+                <a:latin typeface="Trebuchet MS"/>
               </a:rPr>
               <a:t>T-D3-01   ·   Poster T-P04</a:t>
             </a:r>
@@ -4940,9 +4940,9 @@
             <a:r>
               <a:rPr sz="1000" b="0">
                 <a:solidFill>
-                  <a:srgbClr val="A8D88A"/>
-                </a:solidFill>
-                <a:latin typeface="Arial"/>
+                  <a:srgbClr val="F2EFE6"/>
+                </a:solidFill>
+                <a:latin typeface="Trebuchet MS"/>
               </a:rPr>
               <a:t>Teach the Teachers</a:t>
             </a:r>
@@ -4979,9 +4979,9 @@
             <a:r>
               <a:rPr sz="4800" b="1">
                 <a:solidFill>
-                  <a:srgbClr val="F7F2E9"/>
-                </a:solidFill>
-                <a:latin typeface="Georgia"/>
+                  <a:srgbClr val="F2EFE6"/>
+                </a:solidFill>
+                <a:latin typeface="Segoe Print"/>
               </a:rPr>
               <a:t>Day 3</a:t>
             </a:r>
@@ -5003,7 +5003,7 @@
             <a:avLst/>
           </a:prstGeom>
           <a:solidFill>
-            <a:srgbClr val="C07A1E"/>
+            <a:srgbClr val="D2452C"/>
           </a:solidFill>
           <a:ln>
             <a:noFill/>
@@ -5062,9 +5062,9 @@
             <a:r>
               <a:rPr sz="2400" b="0">
                 <a:solidFill>
-                  <a:srgbClr val="A8D88A"/>
-                </a:solidFill>
-                <a:latin typeface="Arial"/>
+                  <a:srgbClr val="F2EFE6"/>
+                </a:solidFill>
+                <a:latin typeface="Trebuchet MS"/>
               </a:rPr>
               <a:t>Hands on, every time</a:t>
             </a:r>
@@ -5078,9 +5078,9 @@
             <a:r>
               <a:rPr sz="2400" b="0">
                 <a:solidFill>
-                  <a:srgbClr val="A8D88A"/>
-                </a:solidFill>
-                <a:latin typeface="Arial"/>
+                  <a:srgbClr val="F2EFE6"/>
+                </a:solidFill>
+                <a:latin typeface="Trebuchet MS"/>
               </a:rPr>
               <a:t>Day 3 of 5</a:t>
             </a:r>
@@ -5102,11 +5102,11 @@
             <a:avLst/>
           </a:prstGeom>
           <a:solidFill>
-            <a:srgbClr val="FBF6EC"/>
+            <a:srgbClr val="C9A77C"/>
           </a:solidFill>
           <a:ln w="15875">
             <a:solidFill>
-              <a:srgbClr val="E2D8C4"/>
+              <a:srgbClr val="2C6FB7"/>
             </a:solidFill>
           </a:ln>
           <a:effectLst/>
@@ -5163,9 +5163,9 @@
             <a:r>
               <a:rPr sz="1200" b="1">
                 <a:solidFill>
-                  <a:srgbClr val="C07A1E"/>
-                </a:solidFill>
-                <a:latin typeface="Arial"/>
+                  <a:srgbClr val="D2452C"/>
+                </a:solidFill>
+                <a:latin typeface="Trebuchet MS"/>
               </a:rPr>
               <a:t>IMAGE · T-IMG-04 · coming</a:t>
             </a:r>
@@ -5202,9 +5202,9 @@
             <a:r>
               <a:rPr sz="1800" b="1">
                 <a:solidFill>
-                  <a:srgbClr val="1F4D2B"/>
-                </a:solidFill>
-                <a:latin typeface="Georgia"/>
+                  <a:srgbClr val="1C1C1C"/>
+                </a:solidFill>
+                <a:latin typeface="Segoe Print"/>
               </a:rPr>
               <a:t>A tablet for a group of five</a:t>
             </a:r>
@@ -5241,9 +5241,9 @@
             <a:r>
               <a:rPr sz="1100" b="0">
                 <a:solidFill>
-                  <a:srgbClr val="20190F"/>
-                </a:solidFill>
-                <a:latin typeface="Arial"/>
+                  <a:srgbClr val="1C1C1C"/>
+                </a:solidFill>
+                <a:latin typeface="Trebuchet MS"/>
               </a:rPr>
               <a:t>Five learners crowd round a tablet held by a young man (the Recorder) at a garden table outdoors in shade. The tablet screen shows a simple animation frame of water soaking into soil (Water blue, soil Ochre). An older woman points at the screen; a young woman beside her already has her hands in a tray of soil, doing what they just watched. A facilitator…</a:t>
             </a:r>
@@ -5264,7 +5264,7 @@
     <p:bg>
       <p:bgPr>
         <a:solidFill>
-          <a:srgbClr val="F7F2E9"/>
+          <a:srgbClr val="C9A77C"/>
         </a:solidFill>
         <a:effectLst/>
       </p:bgPr>
@@ -5306,9 +5306,9 @@
             <a:r>
               <a:rPr sz="1000" b="0">
                 <a:solidFill>
-                  <a:srgbClr val="6B6255"/>
-                </a:solidFill>
-                <a:latin typeface="Arial"/>
+                  <a:srgbClr val="1C1C1C"/>
+                </a:solidFill>
+                <a:latin typeface="Trebuchet MS"/>
               </a:rPr>
               <a:t>T-D3-10   ·   Poster T-P07</a:t>
             </a:r>
@@ -5345,9 +5345,9 @@
             <a:r>
               <a:rPr sz="1000" b="0">
                 <a:solidFill>
-                  <a:srgbClr val="6B6255"/>
-                </a:solidFill>
-                <a:latin typeface="Arial"/>
+                  <a:srgbClr val="1C1C1C"/>
+                </a:solidFill>
+                <a:latin typeface="Trebuchet MS"/>
               </a:rPr>
               <a:t>Teach the Teachers</a:t>
             </a:r>
@@ -5384,9 +5384,9 @@
             <a:r>
               <a:rPr sz="3800" b="1">
                 <a:solidFill>
-                  <a:srgbClr val="1F4D2B"/>
-                </a:solidFill>
-                <a:latin typeface="Georgia"/>
+                  <a:srgbClr val="1C1C1C"/>
+                </a:solidFill>
+                <a:latin typeface="Segoe Print"/>
               </a:rPr>
               <a:t>Step out: unpack</a:t>
             </a:r>
@@ -5408,7 +5408,7 @@
             <a:avLst/>
           </a:prstGeom>
           <a:solidFill>
-            <a:srgbClr val="E2D8C4"/>
+            <a:srgbClr val="2C6FB7"/>
           </a:solidFill>
           <a:ln>
             <a:noFill/>
@@ -5467,9 +5467,9 @@
             <a:r>
               <a:rPr sz="2800" b="0">
                 <a:solidFill>
-                  <a:srgbClr val="20190F"/>
-                </a:solidFill>
-                <a:latin typeface="Arial"/>
+                  <a:srgbClr val="1C1C1C"/>
+                </a:solidFill>
+                <a:latin typeface="Trebuchet MS"/>
               </a:rPr>
               <a:t>•  Who had fewer than 4 ticks?</a:t>
             </a:r>
@@ -5483,9 +5483,9 @@
             <a:r>
               <a:rPr sz="2800" b="0">
                 <a:solidFill>
-                  <a:srgbClr val="20190F"/>
-                </a:solidFill>
-                <a:latin typeface="Arial"/>
+                  <a:srgbClr val="1C1C1C"/>
+                </a:solidFill>
+                <a:latin typeface="Trebuchet MS"/>
               </a:rPr>
               <a:t>•  What kept every hand busy?</a:t>
             </a:r>
@@ -5507,11 +5507,11 @@
             <a:avLst/>
           </a:prstGeom>
           <a:solidFill>
-            <a:srgbClr val="FBF6EC"/>
+            <a:srgbClr val="C9A77C"/>
           </a:solidFill>
           <a:ln w="15875">
             <a:solidFill>
-              <a:srgbClr val="E2D8C4"/>
+              <a:srgbClr val="2C6FB7"/>
             </a:solidFill>
           </a:ln>
           <a:effectLst/>
@@ -5568,9 +5568,9 @@
             <a:r>
               <a:rPr sz="1200" b="1">
                 <a:solidFill>
-                  <a:srgbClr val="C07A1E"/>
-                </a:solidFill>
-                <a:latin typeface="Arial"/>
+                  <a:srgbClr val="D2452C"/>
+                </a:solidFill>
+                <a:latin typeface="Trebuchet MS"/>
               </a:rPr>
               <a:t>IMAGE · T-IMG-04 · coming</a:t>
             </a:r>
@@ -5607,9 +5607,9 @@
             <a:r>
               <a:rPr sz="1800" b="1">
                 <a:solidFill>
-                  <a:srgbClr val="1F4D2B"/>
-                </a:solidFill>
-                <a:latin typeface="Georgia"/>
+                  <a:srgbClr val="1C1C1C"/>
+                </a:solidFill>
+                <a:latin typeface="Segoe Print"/>
               </a:rPr>
               <a:t>A tablet for a group of five</a:t>
             </a:r>
@@ -5646,9 +5646,9 @@
             <a:r>
               <a:rPr sz="1100" b="0">
                 <a:solidFill>
-                  <a:srgbClr val="20190F"/>
-                </a:solidFill>
-                <a:latin typeface="Arial"/>
+                  <a:srgbClr val="1C1C1C"/>
+                </a:solidFill>
+                <a:latin typeface="Trebuchet MS"/>
               </a:rPr>
               <a:t>Five learners crowd round a tablet held by a young man (the Recorder) at a garden table outdoors in shade. The tablet screen shows a simple animation frame of water soaking into soil (Water blue, soil Ochre). An older woman points at the screen; a young woman beside her already has her hands in a tray of soil, doing what they just watched. A facilitator…</a:t>
             </a:r>
@@ -5669,7 +5669,7 @@
     <p:bg>
       <p:bgPr>
         <a:solidFill>
-          <a:srgbClr val="1F4D2B"/>
+          <a:srgbClr val="2F3A33"/>
         </a:solidFill>
         <a:effectLst/>
       </p:bgPr>
@@ -5711,9 +5711,9 @@
             <a:r>
               <a:rPr sz="1000" b="0">
                 <a:solidFill>
-                  <a:srgbClr val="A8D88A"/>
-                </a:solidFill>
-                <a:latin typeface="Arial"/>
+                  <a:srgbClr val="F2EFE6"/>
+                </a:solidFill>
+                <a:latin typeface="Trebuchet MS"/>
               </a:rPr>
               <a:t>T-D3-11   ·   Poster T-P13</a:t>
             </a:r>
@@ -5750,9 +5750,9 @@
             <a:r>
               <a:rPr sz="1000" b="0">
                 <a:solidFill>
-                  <a:srgbClr val="A8D88A"/>
-                </a:solidFill>
-                <a:latin typeface="Arial"/>
+                  <a:srgbClr val="F2EFE6"/>
+                </a:solidFill>
+                <a:latin typeface="Trebuchet MS"/>
               </a:rPr>
               <a:t>Teach the Teachers</a:t>
             </a:r>
@@ -5789,9 +5789,9 @@
             <a:r>
               <a:rPr sz="4800" b="1">
                 <a:solidFill>
-                  <a:srgbClr val="F7F2E9"/>
-                </a:solidFill>
-                <a:latin typeface="Georgia"/>
+                  <a:srgbClr val="F2EFE6"/>
+                </a:solidFill>
+                <a:latin typeface="Segoe Print"/>
               </a:rPr>
               <a:t>Mode 2: slides</a:t>
             </a:r>
@@ -5813,7 +5813,7 @@
             <a:avLst/>
           </a:prstGeom>
           <a:solidFill>
-            <a:srgbClr val="C07A1E"/>
+            <a:srgbClr val="D2452C"/>
           </a:solidFill>
           <a:ln>
             <a:noFill/>
@@ -5872,9 +5872,9 @@
             <a:r>
               <a:rPr sz="2400" b="0">
                 <a:solidFill>
-                  <a:srgbClr val="A8D88A"/>
-                </a:solidFill>
-                <a:latin typeface="Arial"/>
+                  <a:srgbClr val="F2EFE6"/>
+                </a:solidFill>
+                <a:latin typeface="Trebuchet MS"/>
               </a:rPr>
               <a:t>Can you read it from the back?</a:t>
             </a:r>
@@ -5896,11 +5896,11 @@
             <a:avLst/>
           </a:prstGeom>
           <a:solidFill>
-            <a:srgbClr val="FBF6EC"/>
+            <a:srgbClr val="C9A77C"/>
           </a:solidFill>
           <a:ln w="15875">
             <a:solidFill>
-              <a:srgbClr val="E2D8C4"/>
+              <a:srgbClr val="2C6FB7"/>
             </a:solidFill>
           </a:ln>
           <a:effectLst/>
@@ -5957,9 +5957,9 @@
             <a:r>
               <a:rPr sz="1200" b="1">
                 <a:solidFill>
-                  <a:srgbClr val="C07A1E"/>
-                </a:solidFill>
-                <a:latin typeface="Arial"/>
+                  <a:srgbClr val="D2452C"/>
+                </a:solidFill>
+                <a:latin typeface="Trebuchet MS"/>
               </a:rPr>
               <a:t>IMAGE · T-IMG-03 · coming</a:t>
             </a:r>
@@ -5996,9 +5996,9 @@
             <a:r>
               <a:rPr sz="1800" b="1">
                 <a:solidFill>
-                  <a:srgbClr val="1F4D2B"/>
-                </a:solidFill>
-                <a:latin typeface="Georgia"/>
+                  <a:srgbClr val="1C1C1C"/>
+                </a:solidFill>
+                <a:latin typeface="Segoe Print"/>
               </a:rPr>
               <a:t>Projector in daylight</a:t>
             </a:r>
@@ -6035,9 +6035,9 @@
             <a:r>
               <a:rPr sz="1100" b="0">
                 <a:solidFill>
-                  <a:srgbClr val="20190F"/>
-                </a:solidFill>
-                <a:latin typeface="Arial"/>
+                  <a:srgbClr val="1C1C1C"/>
+                </a:solidFill>
+                <a:latin typeface="Trebuchet MS"/>
               </a:rPr>
               <a:t>Split image. Left: a bright church hall with open windows; a projector on a table throws a pale, washed-out rectangle onto a white wall — nothing on it can be seen; learners at the back squint and shade their eyes. Right: the same group in a shaded corner of the hall, gathered close around a large TV on a table; the TV shows a clear picture of a green…</a:t>
             </a:r>
@@ -6058,7 +6058,7 @@
     <p:bg>
       <p:bgPr>
         <a:solidFill>
-          <a:srgbClr val="F7F2E9"/>
+          <a:srgbClr val="C9A77C"/>
         </a:solidFill>
         <a:effectLst/>
       </p:bgPr>
@@ -6100,9 +6100,9 @@
             <a:r>
               <a:rPr sz="1000" b="0">
                 <a:solidFill>
-                  <a:srgbClr val="6B6255"/>
-                </a:solidFill>
-                <a:latin typeface="Arial"/>
+                  <a:srgbClr val="1C1C1C"/>
+                </a:solidFill>
+                <a:latin typeface="Trebuchet MS"/>
               </a:rPr>
               <a:t>T-D3-12   ·   Poster T-P13</a:t>
             </a:r>
@@ -6139,9 +6139,9 @@
             <a:r>
               <a:rPr sz="1000" b="0">
                 <a:solidFill>
-                  <a:srgbClr val="6B6255"/>
-                </a:solidFill>
-                <a:latin typeface="Arial"/>
+                  <a:srgbClr val="1C1C1C"/>
+                </a:solidFill>
+                <a:latin typeface="Trebuchet MS"/>
               </a:rPr>
               <a:t>Teach the Teachers</a:t>
             </a:r>
@@ -6178,9 +6178,9 @@
             <a:r>
               <a:rPr sz="3800" b="1">
                 <a:solidFill>
-                  <a:srgbClr val="1F4D2B"/>
-                </a:solidFill>
-                <a:latin typeface="Georgia"/>
+                  <a:srgbClr val="1C1C1C"/>
+                </a:solidFill>
+                <a:latin typeface="Segoe Print"/>
               </a:rPr>
               <a:t>When slides help</a:t>
             </a:r>
@@ -6202,7 +6202,7 @@
             <a:avLst/>
           </a:prstGeom>
           <a:solidFill>
-            <a:srgbClr val="E2D8C4"/>
+            <a:srgbClr val="2C6FB7"/>
           </a:solidFill>
           <a:ln>
             <a:noFill/>
@@ -6261,9 +6261,9 @@
             <a:r>
               <a:rPr sz="2800" b="0">
                 <a:solidFill>
-                  <a:srgbClr val="20190F"/>
-                </a:solidFill>
-                <a:latin typeface="Arial"/>
+                  <a:srgbClr val="1C1C1C"/>
+                </a:solidFill>
+                <a:latin typeface="Trebuchet MS"/>
               </a:rPr>
               <a:t>•  Things that move or grow</a:t>
             </a:r>
@@ -6277,9 +6277,9 @@
             <a:r>
               <a:rPr sz="2800" b="0">
                 <a:solidFill>
-                  <a:srgbClr val="20190F"/>
-                </a:solidFill>
-                <a:latin typeface="Arial"/>
+                  <a:srgbClr val="1C1C1C"/>
+                </a:solidFill>
+                <a:latin typeface="Trebuchet MS"/>
               </a:rPr>
               <a:t>•  Pests out of season</a:t>
             </a:r>
@@ -6293,9 +6293,9 @@
             <a:r>
               <a:rPr sz="2800" b="0">
                 <a:solidFill>
-                  <a:srgbClr val="20190F"/>
-                </a:solidFill>
-                <a:latin typeface="Arial"/>
+                  <a:srgbClr val="1C1C1C"/>
+                </a:solidFill>
+                <a:latin typeface="Trebuchet MS"/>
               </a:rPr>
               <a:t>•  Big group in a dark room</a:t>
             </a:r>
@@ -6341,7 +6341,7 @@
             <a:avLst/>
           </a:prstGeom>
           <a:solidFill>
-            <a:srgbClr val="20190F"/>
+            <a:srgbClr val="1C1C1C"/>
           </a:solidFill>
           <a:ln>
             <a:noFill/>
@@ -6400,9 +6400,9 @@
             <a:r>
               <a:rPr sz="1100" b="0">
                 <a:solidFill>
-                  <a:srgbClr val="F7F2E9"/>
-                </a:solidFill>
-                <a:latin typeface="Arial"/>
+                  <a:srgbClr val="C9A77C"/>
+                </a:solidFill>
+                <a:latin typeface="Trebuchet MS"/>
               </a:rPr>
               <a:t>▶  Clip T-ANI-18 · play from the tablet: watch-10-compost-heap.mp4</a:t>
             </a:r>
@@ -6423,7 +6423,7 @@
     <p:bg>
       <p:bgPr>
         <a:solidFill>
-          <a:srgbClr val="F7F2E9"/>
+          <a:srgbClr val="C9A77C"/>
         </a:solidFill>
         <a:effectLst/>
       </p:bgPr>
@@ -6465,9 +6465,9 @@
             <a:r>
               <a:rPr sz="1000" b="0">
                 <a:solidFill>
-                  <a:srgbClr val="6B6255"/>
-                </a:solidFill>
-                <a:latin typeface="Arial"/>
+                  <a:srgbClr val="1C1C1C"/>
+                </a:solidFill>
+                <a:latin typeface="Trebuchet MS"/>
               </a:rPr>
               <a:t>T-D3-13   ·   Poster T-P13</a:t>
             </a:r>
@@ -6504,9 +6504,9 @@
             <a:r>
               <a:rPr sz="1000" b="0">
                 <a:solidFill>
-                  <a:srgbClr val="6B6255"/>
-                </a:solidFill>
-                <a:latin typeface="Arial"/>
+                  <a:srgbClr val="1C1C1C"/>
+                </a:solidFill>
+                <a:latin typeface="Trebuchet MS"/>
               </a:rPr>
               <a:t>Teach the Teachers</a:t>
             </a:r>
@@ -6543,9 +6543,9 @@
             <a:r>
               <a:rPr sz="3800" b="1">
                 <a:solidFill>
-                  <a:srgbClr val="1F4D2B"/>
-                </a:solidFill>
-                <a:latin typeface="Georgia"/>
+                  <a:srgbClr val="1C1C1C"/>
+                </a:solidFill>
+                <a:latin typeface="Segoe Print"/>
               </a:rPr>
               <a:t>Set up to be seen</a:t>
             </a:r>
@@ -6567,7 +6567,7 @@
             <a:avLst/>
           </a:prstGeom>
           <a:solidFill>
-            <a:srgbClr val="E2D8C4"/>
+            <a:srgbClr val="2C6FB7"/>
           </a:solidFill>
           <a:ln>
             <a:noFill/>
@@ -6626,9 +6626,9 @@
             <a:r>
               <a:rPr sz="2400" b="0">
                 <a:solidFill>
-                  <a:srgbClr val="20190F"/>
-                </a:solidFill>
-                <a:latin typeface="Arial"/>
+                  <a:srgbClr val="1C1C1C"/>
+                </a:solidFill>
+                <a:latin typeface="Trebuchet MS"/>
               </a:rPr>
               <a:t>•  Test from the back, in daylight</a:t>
             </a:r>
@@ -6642,9 +6642,9 @@
             <a:r>
               <a:rPr sz="2400" b="0">
                 <a:solidFill>
-                  <a:srgbClr val="20190F"/>
-                </a:solidFill>
-                <a:latin typeface="Arial"/>
+                  <a:srgbClr val="1C1C1C"/>
+                </a:solidFill>
+                <a:latin typeface="Trebuchet MS"/>
               </a:rPr>
               <a:t>•  TV beats projector; press B</a:t>
             </a:r>
@@ -6658,9 +6658,9 @@
             <a:r>
               <a:rPr sz="2400" b="0">
                 <a:solidFill>
-                  <a:srgbClr val="20190F"/>
-                </a:solidFill>
-                <a:latin typeface="Arial"/>
+                  <a:srgbClr val="1C1C1C"/>
+                </a:solidFill>
+                <a:latin typeface="Trebuchet MS"/>
               </a:rPr>
               <a:t>•  Tablet per group of 5</a:t>
             </a:r>
@@ -6682,11 +6682,11 @@
             <a:avLst/>
           </a:prstGeom>
           <a:solidFill>
-            <a:srgbClr val="FBF6EC"/>
+            <a:srgbClr val="C9A77C"/>
           </a:solidFill>
           <a:ln w="15875">
             <a:solidFill>
-              <a:srgbClr val="E2D8C4"/>
+              <a:srgbClr val="2C6FB7"/>
             </a:solidFill>
           </a:ln>
           <a:effectLst/>
@@ -6743,9 +6743,9 @@
             <a:r>
               <a:rPr sz="1200" b="1">
                 <a:solidFill>
-                  <a:srgbClr val="C07A1E"/>
-                </a:solidFill>
-                <a:latin typeface="Arial"/>
+                  <a:srgbClr val="D2452C"/>
+                </a:solidFill>
+                <a:latin typeface="Trebuchet MS"/>
               </a:rPr>
               <a:t>IMAGE · T-IMG-04 · coming</a:t>
             </a:r>
@@ -6782,9 +6782,9 @@
             <a:r>
               <a:rPr sz="1800" b="1">
                 <a:solidFill>
-                  <a:srgbClr val="1F4D2B"/>
-                </a:solidFill>
-                <a:latin typeface="Georgia"/>
+                  <a:srgbClr val="1C1C1C"/>
+                </a:solidFill>
+                <a:latin typeface="Segoe Print"/>
               </a:rPr>
               <a:t>A tablet for a group of five</a:t>
             </a:r>
@@ -6821,9 +6821,9 @@
             <a:r>
               <a:rPr sz="1100" b="0">
                 <a:solidFill>
-                  <a:srgbClr val="20190F"/>
-                </a:solidFill>
-                <a:latin typeface="Arial"/>
+                  <a:srgbClr val="1C1C1C"/>
+                </a:solidFill>
+                <a:latin typeface="Trebuchet MS"/>
               </a:rPr>
               <a:t>Five learners crowd round a tablet held by a young man (the Recorder) at a garden table outdoors in shade. The tablet screen shows a simple animation frame of water soaking into soil (Water blue, soil Ochre). An older woman points at the screen; a young woman beside her already has her hands in a tray of soil, doing what they just watched. A facilitator…</a:t>
             </a:r>
@@ -6844,7 +6844,7 @@
     <p:bg>
       <p:bgPr>
         <a:solidFill>
-          <a:srgbClr val="F7F2E9"/>
+          <a:srgbClr val="C9A77C"/>
         </a:solidFill>
         <a:effectLst/>
       </p:bgPr>
@@ -6886,9 +6886,9 @@
             <a:r>
               <a:rPr sz="1000" b="0">
                 <a:solidFill>
-                  <a:srgbClr val="6B6255"/>
-                </a:solidFill>
-                <a:latin typeface="Arial"/>
+                  <a:srgbClr val="1C1C1C"/>
+                </a:solidFill>
+                <a:latin typeface="Trebuchet MS"/>
               </a:rPr>
               <a:t>T-D3-14   ·   Poster T-P13</a:t>
             </a:r>
@@ -6925,9 +6925,9 @@
             <a:r>
               <a:rPr sz="1000" b="0">
                 <a:solidFill>
-                  <a:srgbClr val="6B6255"/>
-                </a:solidFill>
-                <a:latin typeface="Arial"/>
+                  <a:srgbClr val="1C1C1C"/>
+                </a:solidFill>
+                <a:latin typeface="Trebuchet MS"/>
               </a:rPr>
               <a:t>Teach the Teachers</a:t>
             </a:r>
@@ -6949,7 +6949,7 @@
             <a:avLst/>
           </a:prstGeom>
           <a:solidFill>
-            <a:srgbClr val="C07A1E"/>
+            <a:srgbClr val="D2452C"/>
           </a:solidFill>
           <a:ln>
             <a:noFill/>
@@ -7008,9 +7008,9 @@
             <a:r>
               <a:rPr sz="1400" b="1">
                 <a:solidFill>
-                  <a:srgbClr val="F7F2E9"/>
-                </a:solidFill>
-                <a:latin typeface="Arial"/>
+                  <a:srgbClr val="C9A77C"/>
+                </a:solidFill>
+                <a:latin typeface="Trebuchet MS"/>
               </a:rPr>
               <a:t>YOUR TURN</a:t>
             </a:r>
@@ -7047,9 +7047,9 @@
             <a:r>
               <a:rPr sz="3800" b="1">
                 <a:solidFill>
-                  <a:srgbClr val="1F4D2B"/>
-                </a:solidFill>
-                <a:latin typeface="Georgia"/>
+                  <a:srgbClr val="1C1C1C"/>
+                </a:solidFill>
+                <a:latin typeface="Segoe Print"/>
               </a:rPr>
               <a:t>Three stations</a:t>
             </a:r>
@@ -7071,7 +7071,7 @@
             <a:avLst/>
           </a:prstGeom>
           <a:solidFill>
-            <a:srgbClr val="E2D8C4"/>
+            <a:srgbClr val="2C6FB7"/>
           </a:solidFill>
           <a:ln>
             <a:noFill/>
@@ -7130,9 +7130,9 @@
             <a:r>
               <a:rPr sz="3000" b="1">
                 <a:solidFill>
-                  <a:srgbClr val="20190F"/>
-                </a:solidFill>
-                <a:latin typeface="Arial"/>
+                  <a:srgbClr val="1C1C1C"/>
+                </a:solidFill>
+                <a:latin typeface="Trebuchet MS"/>
               </a:rPr>
               <a:t>•  A: big screen, 2 slides</a:t>
             </a:r>
@@ -7146,9 +7146,9 @@
             <a:r>
               <a:rPr sz="3000" b="1">
                 <a:solidFill>
-                  <a:srgbClr val="20190F"/>
-                </a:solidFill>
-                <a:latin typeface="Arial"/>
+                  <a:srgbClr val="1C1C1C"/>
+                </a:solidFill>
+                <a:latin typeface="Trebuchet MS"/>
               </a:rPr>
               <a:t>•  B: tablet clip, teach it</a:t>
             </a:r>
@@ -7162,9 +7162,9 @@
             <a:r>
               <a:rPr sz="3000" b="1">
                 <a:solidFill>
-                  <a:srgbClr val="20190F"/>
-                </a:solidFill>
-                <a:latin typeface="Arial"/>
+                  <a:srgbClr val="1C1C1C"/>
+                </a:solidFill>
+                <a:latin typeface="Trebuchet MS"/>
               </a:rPr>
               <a:t>•  C: paper flip-book</a:t>
             </a:r>
@@ -7186,11 +7186,11 @@
             <a:avLst/>
           </a:prstGeom>
           <a:solidFill>
-            <a:srgbClr val="FBF6EC"/>
+            <a:srgbClr val="C9A77C"/>
           </a:solidFill>
           <a:ln w="15875">
             <a:solidFill>
-              <a:srgbClr val="E2D8C4"/>
+              <a:srgbClr val="2C6FB7"/>
             </a:solidFill>
           </a:ln>
           <a:effectLst/>
@@ -7247,9 +7247,9 @@
             <a:r>
               <a:rPr sz="1200" b="1">
                 <a:solidFill>
-                  <a:srgbClr val="C07A1E"/>
-                </a:solidFill>
-                <a:latin typeface="Arial"/>
+                  <a:srgbClr val="D2452C"/>
+                </a:solidFill>
+                <a:latin typeface="Trebuchet MS"/>
               </a:rPr>
               <a:t>IMAGE · T-IMG-14 · coming</a:t>
             </a:r>
@@ -7286,9 +7286,9 @@
             <a:r>
               <a:rPr sz="1800" b="1">
                 <a:solidFill>
-                  <a:srgbClr val="1F4D2B"/>
-                </a:solidFill>
-                <a:latin typeface="Georgia"/>
+                  <a:srgbClr val="1C1C1C"/>
+                </a:solidFill>
+                <a:latin typeface="Segoe Print"/>
               </a:rPr>
               <a:t>The paper flip-book</a:t>
             </a:r>
@@ -7325,9 +7325,9 @@
             <a:r>
               <a:rPr sz="1100" b="0">
                 <a:solidFill>
-                  <a:srgbClr val="20190F"/>
-                </a:solidFill>
-                <a:latin typeface="Arial"/>
+                  <a:srgbClr val="1C1C1C"/>
+                </a:solidFill>
+                <a:latin typeface="Trebuchet MS"/>
               </a:rPr>
               <a:t>A group of five seated round a small table outdoors. One person holds a ring-bound A4 book of big pictures (a slide printed on each page — simple garden drawings, no text), turning a page toward the group; another points at the picture. No devices anywhere.</a:t>
             </a:r>
@@ -7348,7 +7348,7 @@
     <p:bg>
       <p:bgPr>
         <a:solidFill>
-          <a:srgbClr val="F7F2E9"/>
+          <a:srgbClr val="C9A77C"/>
         </a:solidFill>
         <a:effectLst/>
       </p:bgPr>
@@ -7390,9 +7390,9 @@
             <a:r>
               <a:rPr sz="1000" b="0">
                 <a:solidFill>
-                  <a:srgbClr val="6B6255"/>
-                </a:solidFill>
-                <a:latin typeface="Arial"/>
+                  <a:srgbClr val="1C1C1C"/>
+                </a:solidFill>
+                <a:latin typeface="Trebuchet MS"/>
               </a:rPr>
               <a:t>T-D3-15   ·   Poster T-P14</a:t>
             </a:r>
@@ -7429,9 +7429,9 @@
             <a:r>
               <a:rPr sz="1000" b="0">
                 <a:solidFill>
-                  <a:srgbClr val="6B6255"/>
-                </a:solidFill>
-                <a:latin typeface="Arial"/>
+                  <a:srgbClr val="1C1C1C"/>
+                </a:solidFill>
+                <a:latin typeface="Trebuchet MS"/>
               </a:rPr>
               <a:t>Teach the Teachers</a:t>
             </a:r>
@@ -7468,9 +7468,9 @@
             <a:r>
               <a:rPr sz="3800" b="1">
                 <a:solidFill>
-                  <a:srgbClr val="1F4D2B"/>
-                </a:solidFill>
-                <a:latin typeface="Georgia"/>
+                  <a:srgbClr val="1C1C1C"/>
+                </a:solidFill>
+                <a:latin typeface="Segoe Print"/>
               </a:rPr>
               <a:t>Hand over, don't take over</a:t>
             </a:r>
@@ -7492,7 +7492,7 @@
             <a:avLst/>
           </a:prstGeom>
           <a:solidFill>
-            <a:srgbClr val="E2D8C4"/>
+            <a:srgbClr val="2C6FB7"/>
           </a:solidFill>
           <a:ln>
             <a:noFill/>
@@ -7551,9 +7551,9 @@
             <a:r>
               <a:rPr sz="2800" b="0">
                 <a:solidFill>
-                  <a:srgbClr val="20190F"/>
-                </a:solidFill>
-                <a:latin typeface="Arial"/>
+                  <a:srgbClr val="1C1C1C"/>
+                </a:solidFill>
+                <a:latin typeface="Trebuchet MS"/>
               </a:rPr>
               <a:t>•  Plan who leads each step</a:t>
             </a:r>
@@ -7567,9 +7567,9 @@
             <a:r>
               <a:rPr sz="2800" b="0">
                 <a:solidFill>
-                  <a:srgbClr val="20190F"/>
-                </a:solidFill>
-                <a:latin typeface="Arial"/>
+                  <a:srgbClr val="1C1C1C"/>
+                </a:solidFill>
+                <a:latin typeface="Trebuchet MS"/>
               </a:rPr>
               <a:t>•  Say the handover out loud</a:t>
             </a:r>
@@ -7583,9 +7583,9 @@
             <a:r>
               <a:rPr sz="2800" b="0">
                 <a:solidFill>
-                  <a:srgbClr val="20190F"/>
-                </a:solidFill>
-                <a:latin typeface="Arial"/>
+                  <a:srgbClr val="1C1C1C"/>
+                </a:solidFill>
+                <a:latin typeface="Trebuchet MS"/>
               </a:rPr>
               <a:t>•  Touch your ear to offer</a:t>
             </a:r>
@@ -7607,11 +7607,11 @@
             <a:avLst/>
           </a:prstGeom>
           <a:solidFill>
-            <a:srgbClr val="FBF6EC"/>
+            <a:srgbClr val="C9A77C"/>
           </a:solidFill>
           <a:ln w="15875">
             <a:solidFill>
-              <a:srgbClr val="E2D8C4"/>
+              <a:srgbClr val="2C6FB7"/>
             </a:solidFill>
           </a:ln>
           <a:effectLst/>
@@ -7668,9 +7668,9 @@
             <a:r>
               <a:rPr sz="1200" b="1">
                 <a:solidFill>
-                  <a:srgbClr val="C07A1E"/>
-                </a:solidFill>
-                <a:latin typeface="Arial"/>
+                  <a:srgbClr val="D2452C"/>
+                </a:solidFill>
+                <a:latin typeface="Trebuchet MS"/>
               </a:rPr>
               <a:t>POSTER ART · T-P14-ART · coming</a:t>
             </a:r>
@@ -7707,9 +7707,9 @@
             <a:r>
               <a:rPr sz="1800" b="1">
                 <a:solidFill>
-                  <a:srgbClr val="1F4D2B"/>
-                </a:solidFill>
-                <a:latin typeface="Georgia"/>
+                  <a:srgbClr val="1C1C1C"/>
+                </a:solidFill>
+                <a:latin typeface="Segoe Print"/>
               </a:rPr>
               <a:t>Artwork for T-P14 · Hand over, don't take over</a:t>
             </a:r>
@@ -7746,9 +7746,9 @@
             <a:r>
               <a:rPr sz="1100" b="0">
                 <a:solidFill>
-                  <a:srgbClr val="20190F"/>
-                </a:solidFill>
-                <a:latin typeface="Arial"/>
+                  <a:srgbClr val="1C1C1C"/>
+                </a:solidFill>
+                <a:latin typeface="Trebuchet MS"/>
               </a:rPr>
               <a:t>In front of a seated group, one facilitator hands a seedling tray to a second facilitator, like passing a relay baton; both smile. Behind them, a third small scene of the same second facilitator quietly carrying a crate of materials and making marks on a clipboard while the first one teaches. In a small inset, a facilitator touches her ear with one…</a:t>
             </a:r>
@@ -7769,7 +7769,7 @@
     <p:bg>
       <p:bgPr>
         <a:solidFill>
-          <a:srgbClr val="F7F2E9"/>
+          <a:srgbClr val="C9A77C"/>
         </a:solidFill>
         <a:effectLst/>
       </p:bgPr>
@@ -7811,9 +7811,9 @@
             <a:r>
               <a:rPr sz="1000" b="0">
                 <a:solidFill>
-                  <a:srgbClr val="6B6255"/>
-                </a:solidFill>
-                <a:latin typeface="Arial"/>
+                  <a:srgbClr val="1C1C1C"/>
+                </a:solidFill>
+                <a:latin typeface="Trebuchet MS"/>
               </a:rPr>
               <a:t>T-D3-16   ·   Poster T-P14</a:t>
             </a:r>
@@ -7850,9 +7850,9 @@
             <a:r>
               <a:rPr sz="1000" b="0">
                 <a:solidFill>
-                  <a:srgbClr val="6B6255"/>
-                </a:solidFill>
-                <a:latin typeface="Arial"/>
+                  <a:srgbClr val="1C1C1C"/>
+                </a:solidFill>
+                <a:latin typeface="Trebuchet MS"/>
               </a:rPr>
               <a:t>Teach the Teachers</a:t>
             </a:r>
@@ -7874,7 +7874,7 @@
             <a:avLst/>
           </a:prstGeom>
           <a:solidFill>
-            <a:srgbClr val="C07A1E"/>
+            <a:srgbClr val="D2452C"/>
           </a:solidFill>
           <a:ln>
             <a:noFill/>
@@ -7933,9 +7933,9 @@
             <a:r>
               <a:rPr sz="1400" b="1">
                 <a:solidFill>
-                  <a:srgbClr val="F7F2E9"/>
-                </a:solidFill>
-                <a:latin typeface="Arial"/>
+                  <a:srgbClr val="C9A77C"/>
+                </a:solidFill>
+                <a:latin typeface="Trebuchet MS"/>
               </a:rPr>
               <a:t>YOUR TURN</a:t>
             </a:r>
@@ -7972,9 +7972,9 @@
             <a:r>
               <a:rPr sz="3800" b="1">
                 <a:solidFill>
-                  <a:srgbClr val="1F4D2B"/>
-                </a:solidFill>
-                <a:latin typeface="Georgia"/>
+                  <a:srgbClr val="1C1C1C"/>
+                </a:solidFill>
+                <a:latin typeface="Segoe Print"/>
               </a:rPr>
               <a:t>Micro-teaching Round 3</a:t>
             </a:r>
@@ -7996,7 +7996,7 @@
             <a:avLst/>
           </a:prstGeom>
           <a:solidFill>
-            <a:srgbClr val="E2D8C4"/>
+            <a:srgbClr val="2C6FB7"/>
           </a:solidFill>
           <a:ln>
             <a:noFill/>
@@ -8055,9 +8055,9 @@
             <a:r>
               <a:rPr sz="3000" b="1">
                 <a:solidFill>
-                  <a:srgbClr val="20190F"/>
-                </a:solidFill>
-                <a:latin typeface="Arial"/>
+                  <a:srgbClr val="1C1C1C"/>
+                </a:solidFill>
+                <a:latin typeface="Trebuchet MS"/>
               </a:rPr>
               <a:t>•  15 minutes, pairs, half-class</a:t>
             </a:r>
@@ -8071,9 +8071,9 @@
             <a:r>
               <a:rPr sz="3000" b="1">
                 <a:solidFill>
-                  <a:srgbClr val="20190F"/>
-                </a:solidFill>
-                <a:latin typeface="Arial"/>
+                  <a:srgbClr val="1C1C1C"/>
+                </a:solidFill>
+                <a:latin typeface="Trebuchet MS"/>
               </a:rPr>
               <a:t>•  A practical in two groups of 4</a:t>
             </a:r>
@@ -8087,9 +8087,9 @@
             <a:r>
               <a:rPr sz="3000" b="1">
                 <a:solidFill>
-                  <a:srgbClr val="20190F"/>
-                </a:solidFill>
-                <a:latin typeface="Arial"/>
+                  <a:srgbClr val="1C1C1C"/>
+                </a:solidFill>
+                <a:latin typeface="Trebuchet MS"/>
               </a:rPr>
               <a:t>•  7 minutes feedback</a:t>
             </a:r>
@@ -8111,11 +8111,11 @@
             <a:avLst/>
           </a:prstGeom>
           <a:solidFill>
-            <a:srgbClr val="FBF6EC"/>
+            <a:srgbClr val="C9A77C"/>
           </a:solidFill>
           <a:ln w="15875">
             <a:solidFill>
-              <a:srgbClr val="E2D8C4"/>
+              <a:srgbClr val="2C6FB7"/>
             </a:solidFill>
           </a:ln>
           <a:effectLst/>
@@ -8172,9 +8172,9 @@
             <a:r>
               <a:rPr sz="1200" b="1">
                 <a:solidFill>
-                  <a:srgbClr val="C07A1E"/>
-                </a:solidFill>
-                <a:latin typeface="Arial"/>
+                  <a:srgbClr val="D2452C"/>
+                </a:solidFill>
+                <a:latin typeface="Trebuchet MS"/>
               </a:rPr>
               <a:t>IMAGE · T-IMG-11 · coming</a:t>
             </a:r>
@@ -8211,9 +8211,9 @@
             <a:r>
               <a:rPr sz="1800" b="1">
                 <a:solidFill>
-                  <a:srgbClr val="1F4D2B"/>
-                </a:solidFill>
-                <a:latin typeface="Georgia"/>
+                  <a:srgbClr val="1C1C1C"/>
+                </a:solidFill>
+                <a:latin typeface="Segoe Print"/>
               </a:rPr>
               <a:t>Two facilitators, one lesson</a:t>
             </a:r>
@@ -8250,9 +8250,9 @@
             <a:r>
               <a:rPr sz="1100" b="0">
                 <a:solidFill>
-                  <a:srgbClr val="20190F"/>
-                </a:solidFill>
-                <a:latin typeface="Arial"/>
+                  <a:srgbClr val="1C1C1C"/>
+                </a:solidFill>
+                <a:latin typeface="Trebuchet MS"/>
               </a:rPr>
               <a:t>In front of a seated group, a young woman facilitator hands a seedling tray to a young man facilitator, both smiling, like passing a relay baton. Behind them a crate of tools and a clipboard with tally marks on a chair. Learners watch, one already reaching toward the tray.</a:t>
             </a:r>
@@ -8273,7 +8273,7 @@
     <p:bg>
       <p:bgPr>
         <a:solidFill>
-          <a:srgbClr val="F7F2E9"/>
+          <a:srgbClr val="C9A77C"/>
         </a:solidFill>
         <a:effectLst/>
       </p:bgPr>
@@ -8315,9 +8315,9 @@
             <a:r>
               <a:rPr sz="1000" b="0">
                 <a:solidFill>
-                  <a:srgbClr val="6B6255"/>
-                </a:solidFill>
-                <a:latin typeface="Arial"/>
+                  <a:srgbClr val="1C1C1C"/>
+                </a:solidFill>
+                <a:latin typeface="Trebuchet MS"/>
               </a:rPr>
               <a:t>T-D3-17   ·   Poster T-P10</a:t>
             </a:r>
@@ -8354,9 +8354,9 @@
             <a:r>
               <a:rPr sz="1000" b="0">
                 <a:solidFill>
-                  <a:srgbClr val="6B6255"/>
-                </a:solidFill>
-                <a:latin typeface="Arial"/>
+                  <a:srgbClr val="1C1C1C"/>
+                </a:solidFill>
+                <a:latin typeface="Trebuchet MS"/>
               </a:rPr>
               <a:t>Teach the Teachers</a:t>
             </a:r>
@@ -8393,9 +8393,9 @@
             <a:r>
               <a:rPr sz="3800" b="1">
                 <a:solidFill>
-                  <a:srgbClr val="1F4D2B"/>
-                </a:solidFill>
-                <a:latin typeface="Georgia"/>
+                  <a:srgbClr val="1C1C1C"/>
+                </a:solidFill>
+                <a:latin typeface="Segoe Print"/>
               </a:rPr>
               <a:t>Feedback for pairs</a:t>
             </a:r>
@@ -8417,7 +8417,7 @@
             <a:avLst/>
           </a:prstGeom>
           <a:solidFill>
-            <a:srgbClr val="E2D8C4"/>
+            <a:srgbClr val="2C6FB7"/>
           </a:solidFill>
           <a:ln>
             <a:noFill/>
@@ -8476,9 +8476,9 @@
             <a:r>
               <a:rPr sz="2400" b="0">
                 <a:solidFill>
-                  <a:srgbClr val="20190F"/>
-                </a:solidFill>
-                <a:latin typeface="Arial"/>
+                  <a:srgbClr val="1C1C1C"/>
+                </a:solidFill>
+                <a:latin typeface="Trebuchet MS"/>
               </a:rPr>
               <a:t>•  Partners star each other</a:t>
             </a:r>
@@ -8492,9 +8492,9 @@
             <a:r>
               <a:rPr sz="2400" b="0">
                 <a:solidFill>
-                  <a:srgbClr val="20190F"/>
-                </a:solidFill>
-                <a:latin typeface="Arial"/>
+                  <a:srgbClr val="1C1C1C"/>
+                </a:solidFill>
+                <a:latin typeface="Trebuchet MS"/>
               </a:rPr>
               <a:t>•  Observer 1: talk and questions</a:t>
             </a:r>
@@ -8508,9 +8508,9 @@
             <a:r>
               <a:rPr sz="2400" b="0">
                 <a:solidFill>
-                  <a:srgbClr val="20190F"/>
-                </a:solidFill>
-                <a:latin typeface="Arial"/>
+                  <a:srgbClr val="1C1C1C"/>
+                </a:solidFill>
+                <a:latin typeface="Trebuchet MS"/>
               </a:rPr>
               <a:t>•  Observer 2: hands and handovers</a:t>
             </a:r>
@@ -8532,11 +8532,11 @@
             <a:avLst/>
           </a:prstGeom>
           <a:solidFill>
-            <a:srgbClr val="FBF6EC"/>
+            <a:srgbClr val="C9A77C"/>
           </a:solidFill>
           <a:ln w="15875">
             <a:solidFill>
-              <a:srgbClr val="E2D8C4"/>
+              <a:srgbClr val="2C6FB7"/>
             </a:solidFill>
           </a:ln>
           <a:effectLst/>
@@ -8593,9 +8593,9 @@
             <a:r>
               <a:rPr sz="1200" b="1">
                 <a:solidFill>
-                  <a:srgbClr val="C07A1E"/>
-                </a:solidFill>
-                <a:latin typeface="Arial"/>
+                  <a:srgbClr val="D2452C"/>
+                </a:solidFill>
+                <a:latin typeface="Trebuchet MS"/>
               </a:rPr>
               <a:t>POSTER ART · T-P10-ART · coming</a:t>
             </a:r>
@@ -8632,9 +8632,9 @@
             <a:r>
               <a:rPr sz="1800" b="1">
                 <a:solidFill>
-                  <a:srgbClr val="1F4D2B"/>
-                </a:solidFill>
-                <a:latin typeface="Georgia"/>
+                  <a:srgbClr val="1C1C1C"/>
+                </a:solidFill>
+                <a:latin typeface="Segoe Print"/>
               </a:rPr>
               <a:t>Artwork for T-P10 · Two stars and a wish</a:t>
             </a:r>
@@ -8671,9 +8671,9 @@
             <a:r>
               <a:rPr sz="1100" b="0">
                 <a:solidFill>
-                  <a:srgbClr val="20190F"/>
-                </a:solidFill>
-                <a:latin typeface="Arial"/>
+                  <a:srgbClr val="1C1C1C"/>
+                </a:solidFill>
+                <a:latin typeface="Trebuchet MS"/>
               </a:rPr>
               <a:t>A small group of four seated in a circle after a lesson. A young woman (the teacher) speaks first, hand open. Opposite her, an older man with a clipboard (the observer) speaks kindly; above him float two big Ochre star shapes and one Leaf-green sprouting seedling shape. The teacher, now with hand on heart, listens and nods. A third person smiles and…</a:t>
             </a:r>
@@ -8694,7 +8694,7 @@
     <p:bg>
       <p:bgPr>
         <a:solidFill>
-          <a:srgbClr val="F7F2E9"/>
+          <a:srgbClr val="C9A77C"/>
         </a:solidFill>
         <a:effectLst/>
       </p:bgPr>
@@ -8736,9 +8736,9 @@
             <a:r>
               <a:rPr sz="1000" b="0">
                 <a:solidFill>
-                  <a:srgbClr val="6B6255"/>
-                </a:solidFill>
-                <a:latin typeface="Arial"/>
+                  <a:srgbClr val="1C1C1C"/>
+                </a:solidFill>
+                <a:latin typeface="Trebuchet MS"/>
               </a:rPr>
               <a:t>T-D3-18   ·   Poster T-P16</a:t>
             </a:r>
@@ -8775,9 +8775,9 @@
             <a:r>
               <a:rPr sz="1000" b="0">
                 <a:solidFill>
-                  <a:srgbClr val="6B6255"/>
-                </a:solidFill>
-                <a:latin typeface="Arial"/>
+                  <a:srgbClr val="1C1C1C"/>
+                </a:solidFill>
+                <a:latin typeface="Trebuchet MS"/>
               </a:rPr>
               <a:t>Teach the Teachers</a:t>
             </a:r>
@@ -8814,9 +8814,9 @@
             <a:r>
               <a:rPr sz="3800" b="1">
                 <a:solidFill>
-                  <a:srgbClr val="1F4D2B"/>
-                </a:solidFill>
-                <a:latin typeface="Georgia"/>
+                  <a:srgbClr val="1C1C1C"/>
+                </a:solidFill>
+                <a:latin typeface="Segoe Print"/>
               </a:rPr>
               <a:t>Course craft: the kit</a:t>
             </a:r>
@@ -8838,7 +8838,7 @@
             <a:avLst/>
           </a:prstGeom>
           <a:solidFill>
-            <a:srgbClr val="E2D8C4"/>
+            <a:srgbClr val="2C6FB7"/>
           </a:solidFill>
           <a:ln>
             <a:noFill/>
@@ -8897,9 +8897,9 @@
             <a:r>
               <a:rPr sz="2400" b="0">
                 <a:solidFill>
-                  <a:srgbClr val="20190F"/>
-                </a:solidFill>
-                <a:latin typeface="Arial"/>
+                  <a:srgbClr val="1C1C1C"/>
+                </a:solidFill>
+                <a:latin typeface="Trebuchet MS"/>
               </a:rPr>
               <a:t>•  Count per group, plus one spare</a:t>
             </a:r>
@@ -8913,9 +8913,9 @@
             <a:r>
               <a:rPr sz="2400" b="0">
                 <a:solidFill>
-                  <a:srgbClr val="20190F"/>
-                </a:solidFill>
-                <a:latin typeface="Arial"/>
+                  <a:srgbClr val="1C1C1C"/>
+                </a:solidFill>
+                <a:latin typeface="Trebuchet MS"/>
               </a:rPr>
               <a:t>•  Kit in, kit out, every day</a:t>
             </a:r>
@@ -8929,9 +8929,9 @@
             <a:r>
               <a:rPr sz="2400" b="0">
                 <a:solidFill>
-                  <a:srgbClr val="20190F"/>
-                </a:solidFill>
-                <a:latin typeface="Arial"/>
+                  <a:srgbClr val="1C1C1C"/>
+                </a:solidFill>
+                <a:latin typeface="Trebuchet MS"/>
               </a:rPr>
               <a:t>•  Certificates: registered + 10%</a:t>
             </a:r>
@@ -8953,11 +8953,11 @@
             <a:avLst/>
           </a:prstGeom>
           <a:solidFill>
-            <a:srgbClr val="FBF6EC"/>
+            <a:srgbClr val="C9A77C"/>
           </a:solidFill>
           <a:ln w="15875">
             <a:solidFill>
-              <a:srgbClr val="E2D8C4"/>
+              <a:srgbClr val="2C6FB7"/>
             </a:solidFill>
           </a:ln>
           <a:effectLst/>
@@ -9014,9 +9014,9 @@
             <a:r>
               <a:rPr sz="1200" b="1">
                 <a:solidFill>
-                  <a:srgbClr val="C07A1E"/>
-                </a:solidFill>
-                <a:latin typeface="Arial"/>
+                  <a:srgbClr val="D2452C"/>
+                </a:solidFill>
+                <a:latin typeface="Trebuchet MS"/>
               </a:rPr>
               <a:t>POSTER ART · T-P16-ART · coming</a:t>
             </a:r>
@@ -9053,9 +9053,9 @@
             <a:r>
               <a:rPr sz="1800" b="1">
                 <a:solidFill>
-                  <a:srgbClr val="1F4D2B"/>
-                </a:solidFill>
-                <a:latin typeface="Georgia"/>
+                  <a:srgbClr val="1C1C1C"/>
+                </a:solidFill>
+                <a:latin typeface="Segoe Print"/>
               </a:rPr>
               <a:t>Artwork for T-P16 · Ready by Day 0 — the course kit</a:t>
             </a:r>
@@ -9092,9 +9092,9 @@
             <a:r>
               <a:rPr sz="1100" b="0">
                 <a:solidFill>
-                  <a:srgbClr val="20190F"/>
-                </a:solidFill>
-                <a:latin typeface="Arial"/>
+                  <a:srgbClr val="1C1C1C"/>
+                </a:solidFill>
+                <a:latin typeface="Trebuchet MS"/>
               </a:rPr>
               <a:t>A flat-lay seen from above on a green tarp: four crates, each with a different plant symbol drawn on it (bean, pumpkin, maize cob, marula fruit), holding spades, string, jars and tins; a poster tube; an open flip folder with forms (lines, not letters); a first aid kit with a cross symbol, open; a clipboard with a register grid; a stack of blank…</a:t>
             </a:r>
@@ -9115,7 +9115,7 @@
     <p:bg>
       <p:bgPr>
         <a:solidFill>
-          <a:srgbClr val="F7F2E9"/>
+          <a:srgbClr val="C9A77C"/>
         </a:solidFill>
         <a:effectLst/>
       </p:bgPr>
@@ -9157,9 +9157,9 @@
             <a:r>
               <a:rPr sz="1000" b="0">
                 <a:solidFill>
-                  <a:srgbClr val="6B6255"/>
-                </a:solidFill>
-                <a:latin typeface="Arial"/>
+                  <a:srgbClr val="1C1C1C"/>
+                </a:solidFill>
+                <a:latin typeface="Trebuchet MS"/>
               </a:rPr>
               <a:t>T-D3-02   ·   Poster T-P07</a:t>
             </a:r>
@@ -9196,9 +9196,9 @@
             <a:r>
               <a:rPr sz="1000" b="0">
                 <a:solidFill>
-                  <a:srgbClr val="6B6255"/>
-                </a:solidFill>
-                <a:latin typeface="Arial"/>
+                  <a:srgbClr val="1C1C1C"/>
+                </a:solidFill>
+                <a:latin typeface="Trebuchet MS"/>
               </a:rPr>
               <a:t>Teach the Teachers</a:t>
             </a:r>
@@ -9235,9 +9235,9 @@
             <a:r>
               <a:rPr sz="3800" b="1">
                 <a:solidFill>
-                  <a:srgbClr val="1F4D2B"/>
-                </a:solidFill>
-                <a:latin typeface="Georgia"/>
+                  <a:srgbClr val="1C1C1C"/>
+                </a:solidFill>
+                <a:latin typeface="Segoe Print"/>
               </a:rPr>
               <a:t>The 2022 story</a:t>
             </a:r>
@@ -9259,7 +9259,7 @@
             <a:avLst/>
           </a:prstGeom>
           <a:solidFill>
-            <a:srgbClr val="E2D8C4"/>
+            <a:srgbClr val="2C6FB7"/>
           </a:solidFill>
           <a:ln>
             <a:noFill/>
@@ -9318,9 +9318,9 @@
             <a:r>
               <a:rPr sz="2800" b="0">
                 <a:solidFill>
-                  <a:srgbClr val="20190F"/>
-                </a:solidFill>
-                <a:latin typeface="Arial"/>
+                  <a:srgbClr val="1C1C1C"/>
+                </a:solidFill>
+                <a:latin typeface="Trebuchet MS"/>
               </a:rPr>
               <a:t>•  One person digging</a:t>
             </a:r>
@@ -9334,9 +9334,9 @@
             <a:r>
               <a:rPr sz="2800" b="0">
                 <a:solidFill>
-                  <a:srgbClr val="20190F"/>
-                </a:solidFill>
-                <a:latin typeface="Arial"/>
+                  <a:srgbClr val="1C1C1C"/>
+                </a:solidFill>
+                <a:latin typeface="Trebuchet MS"/>
               </a:rPr>
               <a:t>•  Twenty-five watching</a:t>
             </a:r>
@@ -9350,9 +9350,9 @@
             <a:r>
               <a:rPr sz="2800" b="0">
                 <a:solidFill>
-                  <a:srgbClr val="20190F"/>
-                </a:solidFill>
-                <a:latin typeface="Arial"/>
+                  <a:srgbClr val="1C1C1C"/>
+                </a:solidFill>
+                <a:latin typeface="Trebuchet MS"/>
               </a:rPr>
               <a:t>•  Kit for four groups in the car</a:t>
             </a:r>
@@ -9374,11 +9374,11 @@
             <a:avLst/>
           </a:prstGeom>
           <a:solidFill>
-            <a:srgbClr val="FBF6EC"/>
+            <a:srgbClr val="C9A77C"/>
           </a:solidFill>
           <a:ln w="15875">
             <a:solidFill>
-              <a:srgbClr val="E2D8C4"/>
+              <a:srgbClr val="2C6FB7"/>
             </a:solidFill>
           </a:ln>
           <a:effectLst/>
@@ -9435,9 +9435,9 @@
             <a:r>
               <a:rPr sz="1200" b="1">
                 <a:solidFill>
-                  <a:srgbClr val="C07A1E"/>
-                </a:solidFill>
-                <a:latin typeface="Arial"/>
+                  <a:srgbClr val="D2452C"/>
+                </a:solidFill>
+                <a:latin typeface="Trebuchet MS"/>
               </a:rPr>
               <a:t>ANIMATION · T-ANI-02 · coming</a:t>
             </a:r>
@@ -9474,9 +9474,9 @@
             <a:r>
               <a:rPr sz="1800" b="1">
                 <a:solidFill>
-                  <a:srgbClr val="1F4D2B"/>
-                </a:solidFill>
-                <a:latin typeface="Georgia"/>
+                  <a:srgbClr val="1C1C1C"/>
+                </a:solidFill>
+                <a:latin typeface="Segoe Print"/>
               </a:rPr>
               <a:t>From one demo to five groups</a:t>
             </a:r>
@@ -9513,9 +9513,9 @@
             <a:r>
               <a:rPr sz="1100" b="0">
                 <a:solidFill>
-                  <a:srgbClr val="20190F"/>
-                </a:solidFill>
-                <a:latin typeface="Arial"/>
+                  <a:srgbClr val="1C1C1C"/>
+                </a:solidFill>
+                <a:latin typeface="Trebuchet MS"/>
               </a:rPr>
               <a:t>Top view of a practical site. 0–4 s: one facilitator digging, 25 small figures standing around her in a crowd, still. 4–8 s: the crowd splits into five groups of five that walk to five stations 3 m apart, each with its own small pile of tools. 8–12 s: every figure is moving — digging, carrying, mixing; the facilitator walks between stations with hands…</a:t>
             </a:r>
@@ -9536,7 +9536,7 @@
     <p:bg>
       <p:bgPr>
         <a:solidFill>
-          <a:srgbClr val="F7F2E9"/>
+          <a:srgbClr val="C9A77C"/>
         </a:solidFill>
         <a:effectLst/>
       </p:bgPr>
@@ -9578,9 +9578,9 @@
             <a:r>
               <a:rPr sz="1000" b="0">
                 <a:solidFill>
-                  <a:srgbClr val="6B6255"/>
-                </a:solidFill>
-                <a:latin typeface="Arial"/>
+                  <a:srgbClr val="1C1C1C"/>
+                </a:solidFill>
+                <a:latin typeface="Trebuchet MS"/>
               </a:rPr>
               <a:t>T-D3-03   ·   Poster T-P07</a:t>
             </a:r>
@@ -9617,9 +9617,9 @@
             <a:r>
               <a:rPr sz="1000" b="0">
                 <a:solidFill>
-                  <a:srgbClr val="6B6255"/>
-                </a:solidFill>
-                <a:latin typeface="Arial"/>
+                  <a:srgbClr val="1C1C1C"/>
+                </a:solidFill>
+                <a:latin typeface="Trebuchet MS"/>
               </a:rPr>
               <a:t>Teach the Teachers</a:t>
             </a:r>
@@ -9656,9 +9656,9 @@
             <a:r>
               <a:rPr sz="3800" b="1">
                 <a:solidFill>
-                  <a:srgbClr val="1F4D2B"/>
-                </a:solidFill>
-                <a:latin typeface="Georgia"/>
+                  <a:srgbClr val="1C1C1C"/>
+                </a:solidFill>
+                <a:latin typeface="Segoe Print"/>
               </a:rPr>
               <a:t>Hands on, not a demo</a:t>
             </a:r>
@@ -9680,7 +9680,7 @@
             <a:avLst/>
           </a:prstGeom>
           <a:solidFill>
-            <a:srgbClr val="E2D8C4"/>
+            <a:srgbClr val="2C6FB7"/>
           </a:solidFill>
           <a:ln>
             <a:noFill/>
@@ -9739,9 +9739,9 @@
             <a:r>
               <a:rPr sz="2800" b="0">
                 <a:solidFill>
-                  <a:srgbClr val="20190F"/>
-                </a:solidFill>
-                <a:latin typeface="Arial"/>
+                  <a:srgbClr val="1C1C1C"/>
+                </a:solidFill>
+                <a:latin typeface="Trebuchet MS"/>
               </a:rPr>
               <a:t>•  Kit per group · Demo 3 minutes</a:t>
             </a:r>
@@ -9755,9 +9755,9 @@
             <a:r>
               <a:rPr sz="2800" b="0">
                 <a:solidFill>
-                  <a:srgbClr val="20190F"/>
-                </a:solidFill>
-                <a:latin typeface="Arial"/>
+                  <a:srgbClr val="1C1C1C"/>
+                </a:solidFill>
+                <a:latin typeface="Trebuchet MS"/>
               </a:rPr>
               <a:t>•  Groups of 5 · Stations apart</a:t>
             </a:r>
@@ -9771,9 +9771,9 @@
             <a:r>
               <a:rPr sz="2800" b="0">
                 <a:solidFill>
-                  <a:srgbClr val="20190F"/>
-                </a:solidFill>
-                <a:latin typeface="Arial"/>
+                  <a:srgbClr val="1C1C1C"/>
+                </a:solidFill>
+                <a:latin typeface="Trebuchet MS"/>
               </a:rPr>
               <a:t>•  Hands behind your back</a:t>
             </a:r>
@@ -9795,11 +9795,11 @@
             <a:avLst/>
           </a:prstGeom>
           <a:solidFill>
-            <a:srgbClr val="FBF6EC"/>
+            <a:srgbClr val="C9A77C"/>
           </a:solidFill>
           <a:ln w="15875">
             <a:solidFill>
-              <a:srgbClr val="E2D8C4"/>
+              <a:srgbClr val="2C6FB7"/>
             </a:solidFill>
           </a:ln>
           <a:effectLst/>
@@ -9856,9 +9856,9 @@
             <a:r>
               <a:rPr sz="1200" b="1">
                 <a:solidFill>
-                  <a:srgbClr val="C07A1E"/>
-                </a:solidFill>
-                <a:latin typeface="Arial"/>
+                  <a:srgbClr val="D2452C"/>
+                </a:solidFill>
+                <a:latin typeface="Trebuchet MS"/>
               </a:rPr>
               <a:t>POSTER ART · T-P07-ART · coming</a:t>
             </a:r>
@@ -9895,9 +9895,9 @@
             <a:r>
               <a:rPr sz="1800" b="1">
                 <a:solidFill>
-                  <a:srgbClr val="1F4D2B"/>
-                </a:solidFill>
-                <a:latin typeface="Georgia"/>
+                  <a:srgbClr val="1C1C1C"/>
+                </a:solidFill>
+                <a:latin typeface="Segoe Print"/>
               </a:rPr>
               <a:t>Artwork for T-P07 · A practical, not a demo</a:t>
             </a:r>
@@ -9934,9 +9934,9 @@
             <a:r>
               <a:rPr sz="1100" b="0">
                 <a:solidFill>
-                  <a:srgbClr val="20190F"/>
-                </a:solidFill>
-                <a:latin typeface="Arial"/>
+                  <a:srgbClr val="1C1C1C"/>
+                </a:solidFill>
+                <a:latin typeface="Trebuchet MS"/>
               </a:rPr>
               <a:t>Two panels. Small top-left panel (one third width), drawn in faded greys: one facilitator digging while a crowd of about twenty stands watching, arms folded; a thick Ochre diagonal bar crosses the panel (a "no" sign made of a shape, not a letter). Large main panel: four groups of five at four stations spaced apart on open ground, every person working —…</a:t>
             </a:r>
@@ -9957,7 +9957,7 @@
     <p:bg>
       <p:bgPr>
         <a:solidFill>
-          <a:srgbClr val="F7F2E9"/>
+          <a:srgbClr val="C9A77C"/>
         </a:solidFill>
         <a:effectLst/>
       </p:bgPr>
@@ -9999,9 +9999,9 @@
             <a:r>
               <a:rPr sz="1000" b="0">
                 <a:solidFill>
-                  <a:srgbClr val="6B6255"/>
-                </a:solidFill>
-                <a:latin typeface="Arial"/>
+                  <a:srgbClr val="1C1C1C"/>
+                </a:solidFill>
+                <a:latin typeface="Trebuchet MS"/>
               </a:rPr>
               <a:t>T-D3-04   ·   Poster T-P07</a:t>
             </a:r>
@@ -10038,9 +10038,9 @@
             <a:r>
               <a:rPr sz="1000" b="0">
                 <a:solidFill>
-                  <a:srgbClr val="6B6255"/>
-                </a:solidFill>
-                <a:latin typeface="Arial"/>
+                  <a:srgbClr val="1C1C1C"/>
+                </a:solidFill>
+                <a:latin typeface="Trebuchet MS"/>
               </a:rPr>
               <a:t>Teach the Teachers</a:t>
             </a:r>
@@ -10062,7 +10062,7 @@
             <a:avLst/>
           </a:prstGeom>
           <a:solidFill>
-            <a:srgbClr val="C07A1E"/>
+            <a:srgbClr val="D2452C"/>
           </a:solidFill>
           <a:ln>
             <a:noFill/>
@@ -10121,9 +10121,9 @@
             <a:r>
               <a:rPr sz="1400" b="1">
                 <a:solidFill>
-                  <a:srgbClr val="F7F2E9"/>
-                </a:solidFill>
-                <a:latin typeface="Arial"/>
+                  <a:srgbClr val="C9A77C"/>
+                </a:solidFill>
+                <a:latin typeface="Trebuchet MS"/>
               </a:rPr>
               <a:t>YOUR TURN</a:t>
             </a:r>
@@ -10160,9 +10160,9 @@
             <a:r>
               <a:rPr sz="3800" b="1">
                 <a:solidFill>
-                  <a:srgbClr val="1F4D2B"/>
-                </a:solidFill>
-                <a:latin typeface="Georgia"/>
+                  <a:srgbClr val="1C1C1C"/>
+                </a:solidFill>
+                <a:latin typeface="Segoe Print"/>
               </a:rPr>
               <a:t>Rescue the practical</a:t>
             </a:r>
@@ -10184,7 +10184,7 @@
             <a:avLst/>
           </a:prstGeom>
           <a:solidFill>
-            <a:srgbClr val="E2D8C4"/>
+            <a:srgbClr val="2C6FB7"/>
           </a:solidFill>
           <a:ln>
             <a:noFill/>
@@ -10243,9 +10243,9 @@
             <a:r>
               <a:rPr sz="3000" b="1">
                 <a:solidFill>
-                  <a:srgbClr val="20190F"/>
-                </a:solidFill>
-                <a:latin typeface="Arial"/>
+                  <a:srgbClr val="1C1C1C"/>
+                </a:solidFill>
+                <a:latin typeface="Trebuchet MS"/>
               </a:rPr>
               <a:t>•  One card per group</a:t>
             </a:r>
@@ -10259,9 +10259,9 @@
             <a:r>
               <a:rPr sz="3000" b="1">
                 <a:solidFill>
-                  <a:srgbClr val="20190F"/>
-                </a:solidFill>
-                <a:latin typeface="Arial"/>
+                  <a:srgbClr val="1C1C1C"/>
+                </a:solidFill>
+                <a:latin typeface="Trebuchet MS"/>
               </a:rPr>
               <a:t>•  Plan the rescue, 12 minutes</a:t>
             </a:r>
@@ -10275,9 +10275,9 @@
             <a:r>
               <a:rPr sz="3000" b="1">
                 <a:solidFill>
-                  <a:srgbClr val="20190F"/>
-                </a:solidFill>
-                <a:latin typeface="Arial"/>
+                  <a:srgbClr val="1C1C1C"/>
+                </a:solidFill>
+                <a:latin typeface="Trebuchet MS"/>
               </a:rPr>
               <a:t>•  2 minutes to present</a:t>
             </a:r>
@@ -10299,11 +10299,11 @@
             <a:avLst/>
           </a:prstGeom>
           <a:solidFill>
-            <a:srgbClr val="FBF6EC"/>
+            <a:srgbClr val="C9A77C"/>
           </a:solidFill>
           <a:ln w="15875">
             <a:solidFill>
-              <a:srgbClr val="E2D8C4"/>
+              <a:srgbClr val="2C6FB7"/>
             </a:solidFill>
           </a:ln>
           <a:effectLst/>
@@ -10360,9 +10360,9 @@
             <a:r>
               <a:rPr sz="1200" b="1">
                 <a:solidFill>
-                  <a:srgbClr val="C07A1E"/>
-                </a:solidFill>
-                <a:latin typeface="Arial"/>
+                  <a:srgbClr val="D2452C"/>
+                </a:solidFill>
+                <a:latin typeface="Trebuchet MS"/>
               </a:rPr>
               <a:t>POSTER ART · T-P07-ART · coming</a:t>
             </a:r>
@@ -10399,9 +10399,9 @@
             <a:r>
               <a:rPr sz="1800" b="1">
                 <a:solidFill>
-                  <a:srgbClr val="1F4D2B"/>
-                </a:solidFill>
-                <a:latin typeface="Georgia"/>
+                  <a:srgbClr val="1C1C1C"/>
+                </a:solidFill>
+                <a:latin typeface="Segoe Print"/>
               </a:rPr>
               <a:t>Artwork for T-P07 · A practical, not a demo</a:t>
             </a:r>
@@ -10438,9 +10438,9 @@
             <a:r>
               <a:rPr sz="1100" b="0">
                 <a:solidFill>
-                  <a:srgbClr val="20190F"/>
-                </a:solidFill>
-                <a:latin typeface="Arial"/>
+                  <a:srgbClr val="1C1C1C"/>
+                </a:solidFill>
+                <a:latin typeface="Trebuchet MS"/>
               </a:rPr>
               <a:t>Two panels. Small top-left panel (one third width), drawn in faded greys: one facilitator digging while a crowd of about twenty stands watching, arms folded; a thick Ochre diagonal bar crosses the panel (a "no" sign made of a shape, not a letter). Large main panel: four groups of five at four stations spaced apart on open ground, every person working —…</a:t>
             </a:r>
@@ -10461,7 +10461,7 @@
     <p:bg>
       <p:bgPr>
         <a:solidFill>
-          <a:srgbClr val="F7F2E9"/>
+          <a:srgbClr val="C9A77C"/>
         </a:solidFill>
         <a:effectLst/>
       </p:bgPr>
@@ -10503,9 +10503,9 @@
             <a:r>
               <a:rPr sz="1000" b="0">
                 <a:solidFill>
-                  <a:srgbClr val="6B6255"/>
-                </a:solidFill>
-                <a:latin typeface="Arial"/>
+                  <a:srgbClr val="1C1C1C"/>
+                </a:solidFill>
+                <a:latin typeface="Trebuchet MS"/>
               </a:rPr>
               <a:t>T-D3-05   ·   Poster T-P07</a:t>
             </a:r>
@@ -10542,9 +10542,9 @@
             <a:r>
               <a:rPr sz="1000" b="0">
                 <a:solidFill>
-                  <a:srgbClr val="6B6255"/>
-                </a:solidFill>
-                <a:latin typeface="Arial"/>
+                  <a:srgbClr val="1C1C1C"/>
+                </a:solidFill>
+                <a:latin typeface="Trebuchet MS"/>
               </a:rPr>
               <a:t>Teach the Teachers</a:t>
             </a:r>
@@ -10566,7 +10566,7 @@
             <a:avLst/>
           </a:prstGeom>
           <a:solidFill>
-            <a:srgbClr val="C07A1E"/>
+            <a:srgbClr val="D2452C"/>
           </a:solidFill>
           <a:ln>
             <a:noFill/>
@@ -10625,9 +10625,9 @@
             <a:r>
               <a:rPr sz="1400" b="1">
                 <a:solidFill>
-                  <a:srgbClr val="F7F2E9"/>
-                </a:solidFill>
-                <a:latin typeface="Arial"/>
+                  <a:srgbClr val="C9A77C"/>
+                </a:solidFill>
+                <a:latin typeface="Trebuchet MS"/>
               </a:rPr>
               <a:t>YOUR TURN</a:t>
             </a:r>
@@ -10664,9 +10664,9 @@
             <a:r>
               <a:rPr sz="3800" b="1">
                 <a:solidFill>
-                  <a:srgbClr val="1F4D2B"/>
-                </a:solidFill>
-                <a:latin typeface="Georgia"/>
+                  <a:srgbClr val="1C1C1C"/>
+                </a:solidFill>
+                <a:latin typeface="Segoe Print"/>
               </a:rPr>
               <a:t>One kit? Carousel</a:t>
             </a:r>
@@ -10688,7 +10688,7 @@
             <a:avLst/>
           </a:prstGeom>
           <a:solidFill>
-            <a:srgbClr val="E2D8C4"/>
+            <a:srgbClr val="2C6FB7"/>
           </a:solidFill>
           <a:ln>
             <a:noFill/>
@@ -10747,9 +10747,9 @@
             <a:r>
               <a:rPr sz="3000" b="1">
                 <a:solidFill>
-                  <a:srgbClr val="20190F"/>
-                </a:solidFill>
-                <a:latin typeface="Arial"/>
+                  <a:srgbClr val="1C1C1C"/>
+                </a:solidFill>
+                <a:latin typeface="Trebuchet MS"/>
               </a:rPr>
               <a:t>•  One A-frame, 25 learners</a:t>
             </a:r>
@@ -10763,9 +10763,9 @@
             <a:r>
               <a:rPr sz="3000" b="1">
                 <a:solidFill>
-                  <a:srgbClr val="20190F"/>
-                </a:solidFill>
-                <a:latin typeface="Arial"/>
+                  <a:srgbClr val="1C1C1C"/>
+                </a:solidFill>
+                <a:latin typeface="Trebuchet MS"/>
               </a:rPr>
               <a:t>•  Five stations, 8 minutes each</a:t>
             </a:r>
@@ -10779,9 +10779,9 @@
             <a:r>
               <a:rPr sz="3000" b="1">
                 <a:solidFill>
-                  <a:srgbClr val="20190F"/>
-                </a:solidFill>
-                <a:latin typeface="Arial"/>
+                  <a:srgbClr val="1C1C1C"/>
+                </a:solidFill>
+                <a:latin typeface="Trebuchet MS"/>
               </a:rPr>
               <a:t>•  Nobody watches over 10 minutes</a:t>
             </a:r>
@@ -10827,7 +10827,7 @@
             <a:avLst/>
           </a:prstGeom>
           <a:solidFill>
-            <a:srgbClr val="20190F"/>
+            <a:srgbClr val="1C1C1C"/>
           </a:solidFill>
           <a:ln>
             <a:noFill/>
@@ -10886,9 +10886,9 @@
             <a:r>
               <a:rPr sz="1100" b="0">
                 <a:solidFill>
-                  <a:srgbClr val="F7F2E9"/>
-                </a:solidFill>
-                <a:latin typeface="Arial"/>
+                  <a:srgbClr val="C9A77C"/>
+                </a:solidFill>
+                <a:latin typeface="Trebuchet MS"/>
               </a:rPr>
               <a:t>▶  Clip T-ANI-10 · play from the tablet: flow-a-frame.mp4</a:t>
             </a:r>
@@ -10909,7 +10909,7 @@
     <p:bg>
       <p:bgPr>
         <a:solidFill>
-          <a:srgbClr val="F7F2E9"/>
+          <a:srgbClr val="C9A77C"/>
         </a:solidFill>
         <a:effectLst/>
       </p:bgPr>
@@ -10951,9 +10951,9 @@
             <a:r>
               <a:rPr sz="1000" b="0">
                 <a:solidFill>
-                  <a:srgbClr val="6B6255"/>
-                </a:solidFill>
-                <a:latin typeface="Arial"/>
+                  <a:srgbClr val="1C1C1C"/>
+                </a:solidFill>
+                <a:latin typeface="Trebuchet MS"/>
               </a:rPr>
               <a:t>T-D3-06   ·   Poster T-P16</a:t>
             </a:r>
@@ -10990,9 +10990,9 @@
             <a:r>
               <a:rPr sz="1000" b="0">
                 <a:solidFill>
-                  <a:srgbClr val="6B6255"/>
-                </a:solidFill>
-                <a:latin typeface="Arial"/>
+                  <a:srgbClr val="1C1C1C"/>
+                </a:solidFill>
+                <a:latin typeface="Trebuchet MS"/>
               </a:rPr>
               <a:t>Teach the Teachers</a:t>
             </a:r>
@@ -11014,7 +11014,7 @@
             <a:avLst/>
           </a:prstGeom>
           <a:solidFill>
-            <a:srgbClr val="C07A1E"/>
+            <a:srgbClr val="D2452C"/>
           </a:solidFill>
           <a:ln>
             <a:noFill/>
@@ -11073,9 +11073,9 @@
             <a:r>
               <a:rPr sz="1400" b="1">
                 <a:solidFill>
-                  <a:srgbClr val="F7F2E9"/>
-                </a:solidFill>
-                <a:latin typeface="Arial"/>
+                  <a:srgbClr val="C9A77C"/>
+                </a:solidFill>
+                <a:latin typeface="Trebuchet MS"/>
               </a:rPr>
               <a:t>YOUR TURN</a:t>
             </a:r>
@@ -11112,9 +11112,9 @@
             <a:r>
               <a:rPr sz="3800" b="1">
                 <a:solidFill>
-                  <a:srgbClr val="1F4D2B"/>
-                </a:solidFill>
-                <a:latin typeface="Georgia"/>
+                  <a:srgbClr val="1C1C1C"/>
+                </a:solidFill>
+                <a:latin typeface="Segoe Print"/>
               </a:rPr>
               <a:t>Spot the hazard</a:t>
             </a:r>
@@ -11136,7 +11136,7 @@
             <a:avLst/>
           </a:prstGeom>
           <a:solidFill>
-            <a:srgbClr val="E2D8C4"/>
+            <a:srgbClr val="2C6FB7"/>
           </a:solidFill>
           <a:ln>
             <a:noFill/>
@@ -11195,9 +11195,9 @@
             <a:r>
               <a:rPr sz="3000" b="1">
                 <a:solidFill>
-                  <a:srgbClr val="20190F"/>
-                </a:solidFill>
-                <a:latin typeface="Arial"/>
+                  <a:srgbClr val="1C1C1C"/>
+                </a:solidFill>
+                <a:latin typeface="Trebuchet MS"/>
               </a:rPr>
               <a:t>•  Find 8 hazards in 4 minutes</a:t>
             </a:r>
@@ -11211,9 +11211,9 @@
             <a:r>
               <a:rPr sz="3000" b="1">
                 <a:solidFill>
-                  <a:srgbClr val="20190F"/>
-                </a:solidFill>
-                <a:latin typeface="Arial"/>
+                  <a:srgbClr val="1C1C1C"/>
+                </a:solidFill>
+                <a:latin typeface="Trebuchet MS"/>
               </a:rPr>
               <a:t>•  Tools points down</a:t>
             </a:r>
@@ -11227,9 +11227,9 @@
             <a:r>
               <a:rPr sz="3000" b="1">
                 <a:solidFill>
-                  <a:srgbClr val="20190F"/>
-                </a:solidFill>
-                <a:latin typeface="Arial"/>
+                  <a:srgbClr val="1C1C1C"/>
+                </a:solidFill>
+                <a:latin typeface="Trebuchet MS"/>
               </a:rPr>
               <a:t>•  First aid kit open</a:t>
             </a:r>
@@ -11251,11 +11251,11 @@
             <a:avLst/>
           </a:prstGeom>
           <a:solidFill>
-            <a:srgbClr val="FBF6EC"/>
+            <a:srgbClr val="C9A77C"/>
           </a:solidFill>
           <a:ln w="15875">
             <a:solidFill>
-              <a:srgbClr val="E2D8C4"/>
+              <a:srgbClr val="2C6FB7"/>
             </a:solidFill>
           </a:ln>
           <a:effectLst/>
@@ -11312,9 +11312,9 @@
             <a:r>
               <a:rPr sz="1200" b="1">
                 <a:solidFill>
-                  <a:srgbClr val="C07A1E"/>
-                </a:solidFill>
-                <a:latin typeface="Arial"/>
+                  <a:srgbClr val="D2452C"/>
+                </a:solidFill>
+                <a:latin typeface="Trebuchet MS"/>
               </a:rPr>
               <a:t>IMAGE · T-IMG-16 · coming</a:t>
             </a:r>
@@ -11351,9 +11351,9 @@
             <a:r>
               <a:rPr sz="1800" b="1">
                 <a:solidFill>
-                  <a:srgbClr val="1F4D2B"/>
-                </a:solidFill>
-                <a:latin typeface="Georgia"/>
+                  <a:srgbClr val="1C1C1C"/>
+                </a:solidFill>
+                <a:latin typeface="Segoe Print"/>
               </a:rPr>
               <a:t>Spot the hazard</a:t>
             </a:r>
@@ -11390,9 +11390,9 @@
             <a:r>
               <a:rPr sz="1100" b="0">
                 <a:solidFill>
-                  <a:srgbClr val="20190F"/>
-                </a:solidFill>
-                <a:latin typeface="Arial"/>
+                  <a:srgbClr val="1C1C1C"/>
+                </a:solidFill>
+                <a:latin typeface="Trebuchet MS"/>
               </a:rPr>
               <a:t>A busy practical site with eight hazards for learners to find: a spade lying point-up on a path; a garden fork leaning at head height; an open spray bottle next to a plate of food; a hosepipe across a walkway; a group working in full midday sun with no hats; a first aid box inside a closed car; someone swinging a pick with a person standing just behind;…</a:t>
             </a:r>
@@ -11413,7 +11413,7 @@
     <p:bg>
       <p:bgPr>
         <a:solidFill>
-          <a:srgbClr val="1F4D2B"/>
+          <a:srgbClr val="2F3A33"/>
         </a:solidFill>
         <a:effectLst/>
       </p:bgPr>
@@ -11455,9 +11455,9 @@
             <a:r>
               <a:rPr sz="1000" b="0">
                 <a:solidFill>
-                  <a:srgbClr val="A8D88A"/>
-                </a:solidFill>
-                <a:latin typeface="Arial"/>
+                  <a:srgbClr val="F2EFE6"/>
+                </a:solidFill>
+                <a:latin typeface="Trebuchet MS"/>
               </a:rPr>
               <a:t>T-D3-07   ·   Poster F-P10</a:t>
             </a:r>
@@ -11494,9 +11494,9 @@
             <a:r>
               <a:rPr sz="1000" b="0">
                 <a:solidFill>
-                  <a:srgbClr val="A8D88A"/>
-                </a:solidFill>
-                <a:latin typeface="Arial"/>
+                  <a:srgbClr val="F2EFE6"/>
+                </a:solidFill>
+                <a:latin typeface="Trebuchet MS"/>
               </a:rPr>
               <a:t>Teach the Teachers</a:t>
             </a:r>
@@ -11533,9 +11533,9 @@
             <a:r>
               <a:rPr sz="4800" b="1">
                 <a:solidFill>
-                  <a:srgbClr val="F7F2E9"/>
-                </a:solidFill>
-                <a:latin typeface="Georgia"/>
+                  <a:srgbClr val="F2EFE6"/>
+                </a:solidFill>
+                <a:latin typeface="Segoe Print"/>
               </a:rPr>
               <a:t>Model practical: living soil</a:t>
             </a:r>
@@ -11557,7 +11557,7 @@
             <a:avLst/>
           </a:prstGeom>
           <a:solidFill>
-            <a:srgbClr val="C07A1E"/>
+            <a:srgbClr val="D2452C"/>
           </a:solidFill>
           <a:ln>
             <a:noFill/>
@@ -11616,9 +11616,9 @@
             <a:r>
               <a:rPr sz="2400" b="0">
                 <a:solidFill>
-                  <a:srgbClr val="A8D88A"/>
-                </a:solidFill>
-                <a:latin typeface="Arial"/>
+                  <a:srgbClr val="F2EFE6"/>
+                </a:solidFill>
+                <a:latin typeface="Trebuchet MS"/>
               </a:rPr>
               <a:t>You are farmers now</a:t>
             </a:r>
@@ -11632,9 +11632,9 @@
             <a:r>
               <a:rPr sz="2400" b="0">
                 <a:solidFill>
-                  <a:srgbClr val="A8D88A"/>
-                </a:solidFill>
-                <a:latin typeface="Arial"/>
+                  <a:srgbClr val="F2EFE6"/>
+                </a:solidFill>
+                <a:latin typeface="Trebuchet MS"/>
               </a:rPr>
               <a:t>Recorders: practical-check card</a:t>
             </a:r>
@@ -11680,7 +11680,7 @@
             <a:avLst/>
           </a:prstGeom>
           <a:solidFill>
-            <a:srgbClr val="20190F"/>
+            <a:srgbClr val="1C1C1C"/>
           </a:solidFill>
           <a:ln>
             <a:noFill/>
@@ -11739,9 +11739,9 @@
             <a:r>
               <a:rPr sz="1100" b="0">
                 <a:solidFill>
-                  <a:srgbClr val="F7F2E9"/>
-                </a:solidFill>
-                <a:latin typeface="Arial"/>
+                  <a:srgbClr val="C9A77C"/>
+                </a:solidFill>
+                <a:latin typeface="Trebuchet MS"/>
               </a:rPr>
               <a:t>▶  Clip T-ANI-17 · play from the tablet: watch-05-living-soil.mp4</a:t>
             </a:r>
@@ -11762,7 +11762,7 @@
     <p:bg>
       <p:bgPr>
         <a:solidFill>
-          <a:srgbClr val="F7F2E9"/>
+          <a:srgbClr val="C9A77C"/>
         </a:solidFill>
         <a:effectLst/>
       </p:bgPr>
@@ -11804,9 +11804,9 @@
             <a:r>
               <a:rPr sz="1000" b="0">
                 <a:solidFill>
-                  <a:srgbClr val="6B6255"/>
-                </a:solidFill>
-                <a:latin typeface="Arial"/>
+                  <a:srgbClr val="1C1C1C"/>
+                </a:solidFill>
+                <a:latin typeface="Trebuchet MS"/>
               </a:rPr>
               <a:t>T-D3-08   ·   Poster F-P10</a:t>
             </a:r>
@@ -11843,9 +11843,9 @@
             <a:r>
               <a:rPr sz="1000" b="0">
                 <a:solidFill>
-                  <a:srgbClr val="6B6255"/>
-                </a:solidFill>
-                <a:latin typeface="Arial"/>
+                  <a:srgbClr val="1C1C1C"/>
+                </a:solidFill>
+                <a:latin typeface="Trebuchet MS"/>
               </a:rPr>
               <a:t>Teach the Teachers</a:t>
             </a:r>
@@ -11867,7 +11867,7 @@
             <a:avLst/>
           </a:prstGeom>
           <a:solidFill>
-            <a:srgbClr val="C07A1E"/>
+            <a:srgbClr val="D2452C"/>
           </a:solidFill>
           <a:ln>
             <a:noFill/>
@@ -11926,9 +11926,9 @@
             <a:r>
               <a:rPr sz="1400" b="1">
                 <a:solidFill>
-                  <a:srgbClr val="F7F2E9"/>
-                </a:solidFill>
-                <a:latin typeface="Arial"/>
+                  <a:srgbClr val="C9A77C"/>
+                </a:solidFill>
+                <a:latin typeface="Trebuchet MS"/>
               </a:rPr>
               <a:t>YOUR TURN</a:t>
             </a:r>
@@ -11965,9 +11965,9 @@
             <a:r>
               <a:rPr sz="3800" b="1">
                 <a:solidFill>
-                  <a:srgbClr val="1F4D2B"/>
-                </a:solidFill>
-                <a:latin typeface="Georgia"/>
+                  <a:srgbClr val="1C1C1C"/>
+                </a:solidFill>
+                <a:latin typeface="Segoe Print"/>
               </a:rPr>
               <a:t>Four soil tests</a:t>
             </a:r>
@@ -11989,7 +11989,7 @@
             <a:avLst/>
           </a:prstGeom>
           <a:solidFill>
-            <a:srgbClr val="E2D8C4"/>
+            <a:srgbClr val="2C6FB7"/>
           </a:solidFill>
           <a:ln>
             <a:noFill/>
@@ -12048,9 +12048,9 @@
             <a:r>
               <a:rPr sz="2600" b="1">
                 <a:solidFill>
-                  <a:srgbClr val="20190F"/>
-                </a:solidFill>
-                <a:latin typeface="Arial"/>
+                  <a:srgbClr val="1C1C1C"/>
+                </a:solidFill>
+                <a:latin typeface="Trebuchet MS"/>
               </a:rPr>
               <a:t>•  Squeeze · Jar · Worms · Infiltration</a:t>
             </a:r>
@@ -12064,9 +12064,9 @@
             <a:r>
               <a:rPr sz="2600" b="1">
                 <a:solidFill>
-                  <a:srgbClr val="20190F"/>
-                </a:solidFill>
-                <a:latin typeface="Arial"/>
+                  <a:srgbClr val="1C1C1C"/>
+                </a:solidFill>
+                <a:latin typeface="Trebuchet MS"/>
               </a:rPr>
               <a:t>•  Every person does each</a:t>
             </a:r>
@@ -12080,9 +12080,9 @@
             <a:r>
               <a:rPr sz="2600" b="1">
                 <a:solidFill>
-                  <a:srgbClr val="20190F"/>
-                </a:solidFill>
-                <a:latin typeface="Arial"/>
+                  <a:srgbClr val="1C1C1C"/>
+                </a:solidFill>
+                <a:latin typeface="Trebuchet MS"/>
               </a:rPr>
               <a:t>•  27 minutes</a:t>
             </a:r>
@@ -12128,7 +12128,7 @@
             <a:avLst/>
           </a:prstGeom>
           <a:solidFill>
-            <a:srgbClr val="20190F"/>
+            <a:srgbClr val="1C1C1C"/>
           </a:solidFill>
           <a:ln>
             <a:noFill/>
@@ -12187,9 +12187,9 @@
             <a:r>
               <a:rPr sz="1100" b="0">
                 <a:solidFill>
-                  <a:srgbClr val="F7F2E9"/>
-                </a:solidFill>
-                <a:latin typeface="Arial"/>
+                  <a:srgbClr val="C9A77C"/>
+                </a:solidFill>
+                <a:latin typeface="Trebuchet MS"/>
               </a:rPr>
               <a:t>▶  Clip T-ANI-19 · play from the tablet: tour-soil-observation.mp4</a:t>
             </a:r>
@@ -12210,7 +12210,7 @@
     <p:bg>
       <p:bgPr>
         <a:solidFill>
-          <a:srgbClr val="F7F2E9"/>
+          <a:srgbClr val="C9A77C"/>
         </a:solidFill>
         <a:effectLst/>
       </p:bgPr>
@@ -12252,9 +12252,9 @@
             <a:r>
               <a:rPr sz="1000" b="0">
                 <a:solidFill>
-                  <a:srgbClr val="6B6255"/>
-                </a:solidFill>
-                <a:latin typeface="Arial"/>
+                  <a:srgbClr val="1C1C1C"/>
+                </a:solidFill>
+                <a:latin typeface="Trebuchet MS"/>
               </a:rPr>
               <a:t>T-D3-09   ·   Poster T-P21</a:t>
             </a:r>
@@ -12291,9 +12291,9 @@
             <a:r>
               <a:rPr sz="1000" b="0">
                 <a:solidFill>
-                  <a:srgbClr val="6B6255"/>
-                </a:solidFill>
-                <a:latin typeface="Arial"/>
+                  <a:srgbClr val="1C1C1C"/>
+                </a:solidFill>
+                <a:latin typeface="Trebuchet MS"/>
               </a:rPr>
               <a:t>Teach the Teachers</a:t>
             </a:r>
@@ -12315,7 +12315,7 @@
             <a:avLst/>
           </a:prstGeom>
           <a:solidFill>
-            <a:srgbClr val="C07A1E"/>
+            <a:srgbClr val="D2452C"/>
           </a:solidFill>
           <a:ln>
             <a:noFill/>
@@ -12374,9 +12374,9 @@
             <a:r>
               <a:rPr sz="1400" b="1">
                 <a:solidFill>
-                  <a:srgbClr val="F7F2E9"/>
-                </a:solidFill>
-                <a:latin typeface="Arial"/>
+                  <a:srgbClr val="C9A77C"/>
+                </a:solidFill>
+                <a:latin typeface="Trebuchet MS"/>
               </a:rPr>
               <a:t>YOUR TURN</a:t>
             </a:r>
@@ -12413,9 +12413,9 @@
             <a:r>
               <a:rPr sz="3800" b="1">
                 <a:solidFill>
-                  <a:srgbClr val="1F4D2B"/>
-                </a:solidFill>
-                <a:latin typeface="Georgia"/>
+                  <a:srgbClr val="1C1C1C"/>
+                </a:solidFill>
+                <a:latin typeface="Segoe Print"/>
               </a:rPr>
               <a:t>Test it side by side</a:t>
             </a:r>
@@ -12437,7 +12437,7 @@
             <a:avLst/>
           </a:prstGeom>
           <a:solidFill>
-            <a:srgbClr val="E2D8C4"/>
+            <a:srgbClr val="2C6FB7"/>
           </a:solidFill>
           <a:ln>
             <a:noFill/>
@@ -12496,9 +12496,9 @@
             <a:r>
               <a:rPr sz="3000" b="1">
                 <a:solidFill>
-                  <a:srgbClr val="20190F"/>
-                </a:solidFill>
-                <a:latin typeface="Arial"/>
+                  <a:srgbClr val="1C1C1C"/>
+                </a:solidFill>
+                <a:latin typeface="Trebuchet MS"/>
               </a:rPr>
               <a:t>•  Two pots, one change</a:t>
             </a:r>
@@ -12512,9 +12512,9 @@
             <a:r>
               <a:rPr sz="3000" b="1">
                 <a:solidFill>
-                  <a:srgbClr val="20190F"/>
-                </a:solidFill>
-                <a:latin typeface="Arial"/>
+                  <a:srgbClr val="1C1C1C"/>
+                </a:solidFill>
+                <a:latin typeface="Trebuchet MS"/>
               </a:rPr>
               <a:t>•  Sow, label, water the same</a:t>
             </a:r>
@@ -12528,9 +12528,9 @@
             <a:r>
               <a:rPr sz="3000" b="1">
                 <a:solidFill>
-                  <a:srgbClr val="20190F"/>
-                </a:solidFill>
-                <a:latin typeface="Arial"/>
+                  <a:srgbClr val="1C1C1C"/>
+                </a:solidFill>
+                <a:latin typeface="Trebuchet MS"/>
               </a:rPr>
               <a:t>•  Predict, then look on Day 5</a:t>
             </a:r>
@@ -12552,11 +12552,11 @@
             <a:avLst/>
           </a:prstGeom>
           <a:solidFill>
-            <a:srgbClr val="FBF6EC"/>
+            <a:srgbClr val="C9A77C"/>
           </a:solidFill>
           <a:ln w="15875">
             <a:solidFill>
-              <a:srgbClr val="E2D8C4"/>
+              <a:srgbClr val="2C6FB7"/>
             </a:solidFill>
           </a:ln>
           <a:effectLst/>
@@ -12613,9 +12613,9 @@
             <a:r>
               <a:rPr sz="1200" b="1">
                 <a:solidFill>
-                  <a:srgbClr val="C07A1E"/>
-                </a:solidFill>
-                <a:latin typeface="Arial"/>
+                  <a:srgbClr val="D2452C"/>
+                </a:solidFill>
+                <a:latin typeface="Trebuchet MS"/>
               </a:rPr>
               <a:t>POSTER ART · T-P21-ART · coming</a:t>
             </a:r>
@@ -12652,9 +12652,9 @@
             <a:r>
               <a:rPr sz="1800" b="1">
                 <a:solidFill>
-                  <a:srgbClr val="1F4D2B"/>
-                </a:solidFill>
-                <a:latin typeface="Georgia"/>
+                  <a:srgbClr val="1C1C1C"/>
+                </a:solidFill>
+                <a:latin typeface="Segoe Print"/>
               </a:rPr>
               <a:t>Artwork for T-P21 · Test it side by side</a:t>
             </a:r>
@@ -12691,9 +12691,9 @@
             <a:r>
               <a:rPr sz="1100" b="0">
                 <a:solidFill>
-                  <a:srgbClr val="20190F"/>
-                </a:solidFill>
-                <a:latin typeface="Arial"/>
+                  <a:srgbClr val="1C1C1C"/>
+                </a:solidFill>
+                <a:latin typeface="Trebuchet MS"/>
               </a:rPr>
               <a:t>Two small plots side by side, divided by a string line. Left plot: bare soil, small pale plants. Right plot: mulched soil with compost, taller dark-green plants. A group of five farmers crouches between them: one measures a plant against a marked stick, one draws on a clipboard, one holds a handful of soil from each side, two discuss, pointing. Along the…</a:t>
             </a:r>

--- a/courses/build/teach-the-teachers/T-D3.pptx
+++ b/courses/build/teach-the-teachers/T-D3.pptx
@@ -768,7 +768,7 @@
           </a:p>
           <a:p>
             <a:r>
-              <a:t>Clip T-ANI-18: public/course-animations/soil-health/watch-10-compost-heap.mp4</a:t>
+              <a:t>Clip T-ANI-18: public/course-animations/soil-health/flow-build-compost-heap.mp4</a:t>
             </a:r>
           </a:p>
         </p:txBody>
@@ -1700,7 +1700,7 @@
           </a:p>
           <a:p>
             <a:r>
-              <a:t>Clip T-ANI-17: public/course-animations/soil-health/watch-05-living-soil.mp4</a:t>
+              <a:t>Clip T-ANI-17: public/course-media/teach-the-teachers/T-ANI-17.mp4</a:t>
             </a:r>
           </a:p>
         </p:txBody>
@@ -1781,7 +1781,7 @@
           </a:p>
           <a:p>
             <a:r>
-              <a:t>Clip T-ANI-19: public/course-animations/soil-health/tour-soil-observation.mp4</a:t>
+              <a:t>Clip T-ANI-19: public/course-media/teach-the-teachers/T-ANI-19.mp4</a:t>
             </a:r>
           </a:p>
         </p:txBody>
@@ -6304,7 +6304,7 @@
       </p:sp>
       <p:pic>
         <p:nvPicPr>
-          <p:cNvPr id="7" name="Picture 6" descr="watch-10-compost-heap.jpg"/>
+          <p:cNvPr id="7" name="Picture 6" descr="flow-build-compost-heap.jpg"/>
           <p:cNvPicPr>
             <a:picLocks noChangeAspect="1"/>
           </p:cNvPicPr>
@@ -6404,7 +6404,7 @@
                 </a:solidFill>
                 <a:latin typeface="Trebuchet MS"/>
               </a:rPr>
-              <a:t>▶  Clip T-ANI-18 · play from the tablet: watch-10-compost-heap.mp4</a:t>
+              <a:t>▶  Clip T-ANI-18 · play from the tablet: flow-build-compost-heap.mp4</a:t>
             </a:r>
           </a:p>
         </p:txBody>
@@ -11641,49 +11641,27 @@
           </a:p>
         </p:txBody>
       </p:sp>
-      <p:pic>
-        <p:nvPicPr>
-          <p:cNvPr id="7" name="Picture 6" descr="watch-05-living-soil.jpg"/>
-          <p:cNvPicPr>
-            <a:picLocks noChangeAspect="1"/>
-          </p:cNvPicPr>
-          <p:nvPr/>
-        </p:nvPicPr>
-        <p:blipFill>
-          <a:blip r:embed="rId2"/>
-          <a:stretch>
-            <a:fillRect/>
-          </a:stretch>
-        </p:blipFill>
-        <p:spPr>
-          <a:xfrm>
-            <a:off x="7498079" y="2108835"/>
-            <a:ext cx="4206240" cy="2366010"/>
-          </a:xfrm>
-          <a:prstGeom prst="rect">
-            <a:avLst/>
-          </a:prstGeom>
-        </p:spPr>
-      </p:pic>
-      <p:sp>
-        <p:nvSpPr>
-          <p:cNvPr id="8" name="Rectangle 7"/>
+      <p:sp>
+        <p:nvSpPr>
+          <p:cNvPr id="7" name="Rectangle 6"/>
           <p:cNvSpPr/>
           <p:nvPr/>
         </p:nvSpPr>
         <p:spPr>
           <a:xfrm>
-            <a:off x="7498079" y="5257800"/>
-            <a:ext cx="4206240" cy="411480"/>
+            <a:off x="7498079" y="914400"/>
+            <a:ext cx="4206240" cy="4754880"/>
           </a:xfrm>
           <a:prstGeom prst="rect">
             <a:avLst/>
           </a:prstGeom>
           <a:solidFill>
-            <a:srgbClr val="1C1C1C"/>
+            <a:srgbClr val="C9A77C"/>
           </a:solidFill>
-          <a:ln>
-            <a:noFill/>
+          <a:ln w="15875">
+            <a:solidFill>
+              <a:srgbClr val="2C6FB7"/>
+            </a:solidFill>
           </a:ln>
           <a:effectLst/>
         </p:spPr>
@@ -11711,14 +11689,53 @@
       </p:sp>
       <p:sp>
         <p:nvSpPr>
+          <p:cNvPr id="8" name="TextBox 7"/>
+          <p:cNvSpPr txBox="1"/>
+          <p:nvPr/>
+        </p:nvSpPr>
+        <p:spPr>
+          <a:xfrm>
+            <a:off x="7726679" y="1097280"/>
+            <a:ext cx="3749040" cy="365760"/>
+          </a:xfrm>
+          <a:prstGeom prst="rect">
+            <a:avLst/>
+          </a:prstGeom>
+          <a:noFill/>
+        </p:spPr>
+        <p:txBody>
+          <a:bodyPr wrap="square" anchor="t" lIns="45720" rIns="45720">
+            <a:spAutoFit/>
+          </a:bodyPr>
+          <a:lstStyle/>
+          <a:p>
+            <a:pPr algn="l">
+              <a:spcAft>
+                <a:spcPts val="800"/>
+              </a:spcAft>
+            </a:pPr>
+            <a:r>
+              <a:rPr sz="1200" b="1">
+                <a:solidFill>
+                  <a:srgbClr val="D2452C"/>
+                </a:solidFill>
+                <a:latin typeface="Trebuchet MS"/>
+              </a:rPr>
+              <a:t>ANIMATION · T-ANI-17 · coming</a:t>
+            </a:r>
+          </a:p>
+        </p:txBody>
+      </p:sp>
+      <p:sp>
+        <p:nvSpPr>
           <p:cNvPr id="9" name="TextBox 8"/>
           <p:cNvSpPr txBox="1"/>
           <p:nvPr/>
         </p:nvSpPr>
         <p:spPr>
           <a:xfrm>
-            <a:off x="7589519" y="5266944"/>
-            <a:ext cx="4023360" cy="384048"/>
+            <a:off x="7726679" y="1481328"/>
+            <a:ext cx="3749040" cy="457200"/>
           </a:xfrm>
           <a:prstGeom prst="rect">
             <a:avLst/>
@@ -11726,7 +11743,7 @@
           <a:noFill/>
         </p:spPr>
         <p:txBody>
-          <a:bodyPr wrap="square" anchor="ctr" lIns="45720" rIns="45720">
+          <a:bodyPr wrap="square" anchor="t" lIns="45720" rIns="45720">
             <a:spAutoFit/>
           </a:bodyPr>
           <a:lstStyle/>
@@ -11737,13 +11754,52 @@
               </a:spcAft>
             </a:pPr>
             <a:r>
+              <a:rPr sz="1800" b="1">
+                <a:solidFill>
+                  <a:srgbClr val="1C1C1C"/>
+                </a:solidFill>
+                <a:latin typeface="Segoe Print"/>
+              </a:rPr>
+              <a:t>Living soil</a:t>
+            </a:r>
+          </a:p>
+        </p:txBody>
+      </p:sp>
+      <p:sp>
+        <p:nvSpPr>
+          <p:cNvPr id="10" name="TextBox 9"/>
+          <p:cNvSpPr txBox="1"/>
+          <p:nvPr/>
+        </p:nvSpPr>
+        <p:spPr>
+          <a:xfrm>
+            <a:off x="7726679" y="2011680"/>
+            <a:ext cx="3749040" cy="3474720"/>
+          </a:xfrm>
+          <a:prstGeom prst="rect">
+            <a:avLst/>
+          </a:prstGeom>
+          <a:noFill/>
+        </p:spPr>
+        <p:txBody>
+          <a:bodyPr wrap="square" anchor="t" lIns="45720" rIns="45720">
+            <a:spAutoFit/>
+          </a:bodyPr>
+          <a:lstStyle/>
+          <a:p>
+            <a:pPr algn="l">
+              <a:spcAft>
+                <a:spcPts val="800"/>
+              </a:spcAft>
+            </a:pPr>
+            <a:r>
               <a:rPr sz="1100" b="0">
                 <a:solidFill>
-                  <a:srgbClr val="C9A77C"/>
+                  <a:srgbClr val="1C1C1C"/>
                 </a:solidFill>
                 <a:latin typeface="Trebuchet MS"/>
               </a:rPr>
-              <a:t>▶  Clip T-ANI-17 · play from the tablet: watch-05-living-soil.mp4</a:t>
+              <a:t>Cut-away of dark garden soil under mulch, magnified: earthworms tunnel, fungus threads link roots, tiny specks of life move, crumbs hold air and water droplets; a fallen leaf above is slowly broken down and pulled into the soil. (Replaces the withdrawn clip `soil-health/watch-05-living-soil.mp4`.)</a:t>
             </a:r>
           </a:p>
         </p:txBody>
@@ -12089,49 +12145,27 @@
           </a:p>
         </p:txBody>
       </p:sp>
-      <p:pic>
-        <p:nvPicPr>
-          <p:cNvPr id="9" name="Picture 8" descr="tour-soil-observation.jpg"/>
-          <p:cNvPicPr>
-            <a:picLocks noChangeAspect="1"/>
-          </p:cNvPicPr>
-          <p:nvPr/>
-        </p:nvPicPr>
-        <p:blipFill>
-          <a:blip r:embed="rId2"/>
-          <a:stretch>
-            <a:fillRect/>
-          </a:stretch>
-        </p:blipFill>
-        <p:spPr>
-          <a:xfrm>
-            <a:off x="5852160" y="2148840"/>
-            <a:ext cx="5852160" cy="4023360"/>
-          </a:xfrm>
-          <a:prstGeom prst="rect">
-            <a:avLst/>
-          </a:prstGeom>
-        </p:spPr>
-      </p:pic>
-      <p:sp>
-        <p:nvSpPr>
-          <p:cNvPr id="10" name="Rectangle 9"/>
+      <p:sp>
+        <p:nvSpPr>
+          <p:cNvPr id="9" name="Rectangle 8"/>
           <p:cNvSpPr/>
           <p:nvPr/>
         </p:nvSpPr>
         <p:spPr>
           <a:xfrm>
-            <a:off x="5852160" y="5806440"/>
-            <a:ext cx="5852160" cy="411480"/>
+            <a:off x="5852160" y="2103120"/>
+            <a:ext cx="5852160" cy="4114800"/>
           </a:xfrm>
           <a:prstGeom prst="rect">
             <a:avLst/>
           </a:prstGeom>
           <a:solidFill>
-            <a:srgbClr val="1C1C1C"/>
+            <a:srgbClr val="C9A77C"/>
           </a:solidFill>
-          <a:ln>
-            <a:noFill/>
+          <a:ln w="15875">
+            <a:solidFill>
+              <a:srgbClr val="2C6FB7"/>
+            </a:solidFill>
           </a:ln>
           <a:effectLst/>
         </p:spPr>
@@ -12159,14 +12193,53 @@
       </p:sp>
       <p:sp>
         <p:nvSpPr>
+          <p:cNvPr id="10" name="TextBox 9"/>
+          <p:cNvSpPr txBox="1"/>
+          <p:nvPr/>
+        </p:nvSpPr>
+        <p:spPr>
+          <a:xfrm>
+            <a:off x="6080760" y="2286000"/>
+            <a:ext cx="5394960" cy="365760"/>
+          </a:xfrm>
+          <a:prstGeom prst="rect">
+            <a:avLst/>
+          </a:prstGeom>
+          <a:noFill/>
+        </p:spPr>
+        <p:txBody>
+          <a:bodyPr wrap="square" anchor="t" lIns="45720" rIns="45720">
+            <a:spAutoFit/>
+          </a:bodyPr>
+          <a:lstStyle/>
+          <a:p>
+            <a:pPr algn="l">
+              <a:spcAft>
+                <a:spcPts val="800"/>
+              </a:spcAft>
+            </a:pPr>
+            <a:r>
+              <a:rPr sz="1200" b="1">
+                <a:solidFill>
+                  <a:srgbClr val="D2452C"/>
+                </a:solidFill>
+                <a:latin typeface="Trebuchet MS"/>
+              </a:rPr>
+              <a:t>ANIMATION · T-ANI-19 · coming</a:t>
+            </a:r>
+          </a:p>
+        </p:txBody>
+      </p:sp>
+      <p:sp>
+        <p:nvSpPr>
           <p:cNvPr id="11" name="TextBox 10"/>
           <p:cNvSpPr txBox="1"/>
           <p:nvPr/>
         </p:nvSpPr>
         <p:spPr>
           <a:xfrm>
-            <a:off x="5943600" y="5815584"/>
-            <a:ext cx="5669280" cy="384048"/>
+            <a:off x="6080760" y="2670048"/>
+            <a:ext cx="5394960" cy="457200"/>
           </a:xfrm>
           <a:prstGeom prst="rect">
             <a:avLst/>
@@ -12174,7 +12247,7 @@
           <a:noFill/>
         </p:spPr>
         <p:txBody>
-          <a:bodyPr wrap="square" anchor="ctr" lIns="45720" rIns="45720">
+          <a:bodyPr wrap="square" anchor="t" lIns="45720" rIns="45720">
             <a:spAutoFit/>
           </a:bodyPr>
           <a:lstStyle/>
@@ -12185,13 +12258,52 @@
               </a:spcAft>
             </a:pPr>
             <a:r>
+              <a:rPr sz="1800" b="1">
+                <a:solidFill>
+                  <a:srgbClr val="1C1C1C"/>
+                </a:solidFill>
+                <a:latin typeface="Segoe Print"/>
+              </a:rPr>
+              <a:t>Soil observation</a:t>
+            </a:r>
+          </a:p>
+        </p:txBody>
+      </p:sp>
+      <p:sp>
+        <p:nvSpPr>
+          <p:cNvPr id="12" name="TextBox 11"/>
+          <p:cNvSpPr txBox="1"/>
+          <p:nvPr/>
+        </p:nvSpPr>
+        <p:spPr>
+          <a:xfrm>
+            <a:off x="6080760" y="3200400"/>
+            <a:ext cx="5394960" cy="2834640"/>
+          </a:xfrm>
+          <a:prstGeom prst="rect">
+            <a:avLst/>
+          </a:prstGeom>
+          <a:noFill/>
+        </p:spPr>
+        <p:txBody>
+          <a:bodyPr wrap="square" anchor="t" lIns="45720" rIns="45720">
+            <a:spAutoFit/>
+          </a:bodyPr>
+          <a:lstStyle/>
+          <a:p>
+            <a:pPr algn="l">
+              <a:spcAft>
+                <a:spcPts val="800"/>
+              </a:spcAft>
+            </a:pPr>
+            <a:r>
               <a:rPr sz="1100" b="0">
                 <a:solidFill>
-                  <a:srgbClr val="C9A77C"/>
+                  <a:srgbClr val="1C1C1C"/>
                 </a:solidFill>
                 <a:latin typeface="Trebuchet MS"/>
               </a:rPr>
-              <a:t>▶  Clip T-ANI-19 · play from the tablet: tour-soil-observation.mp4</a:t>
+              <a:t>Hands dig a spade-deep square of garden soil, lift it and crumble it: dark crumbs, fine roots, an earthworm, fungus threads. Beside it a pale hard lump from a path cracks apart with nothing living in it. Slow side-by-side comparison. (Replaces the withdrawn clip `soil-health/tour-soil-observation.mp4`.)</a:t>
             </a:r>
           </a:p>
         </p:txBody>
